--- a/mon/toan/slide/lop10/BaiGiangDienTu_TOAN10_Bai8_TongHieuHaiVecto_T28-29.pptx
+++ b/mon/toan/slide/lop10/BaiGiangDienTu_TOAN10_Bai8_TongHieuHaiVecto_T28-29.pptx
@@ -6508,7 +6508,7 @@
       </p:sp>
       <p:sp>
         <p:nvSpPr>
-          <p:cNvPr id="10" name="Rounded Rectangle 9"/>
+          <p:cNvPr id="10" name="s2_nen"/>
           <p:cNvSpPr/>
           <p:nvPr/>
         </p:nvSpPr>
@@ -6558,7 +6558,7 @@
         <mc:Choice xmlns:a14="http://schemas.microsoft.com/office/drawing/2010/main" Requires="a14">
           <p:sp>
             <p:nvSpPr>
-              <p:cNvPr id="11" name="TextBox 10"/>
+              <p:cNvPr id="11" name="s2_chu"/>
               <p:cNvSpPr txBox="1"/>
               <p:nvPr/>
             </p:nvSpPr>
@@ -6929,7 +6929,7 @@
         <mc:Choice xmlns:a14="http://schemas.microsoft.com/office/drawing/2010/main" Requires="a14">
           <p:sp>
             <p:nvSpPr>
-              <p:cNvPr id="12" name="TextBox 11"/>
+              <p:cNvPr id="12" name="s3_chu"/>
               <p:cNvSpPr txBox="1"/>
               <p:nvPr/>
             </p:nvSpPr>
@@ -7199,6 +7199,123 @@
                                         </p:cTn>
                                         <p:tgtEl>
                                           <p:spTgt spid="9"/>
+                                        </p:tgtEl>
+                                        <p:attrNameLst>
+                                          <p:attrName>style.visibility</p:attrName>
+                                        </p:attrNameLst>
+                                      </p:cBhvr>
+                                      <p:to>
+                                        <p:strVal val="visible"/>
+                                      </p:to>
+                                    </p:set>
+                                  </p:childTnLst>
+                                </p:cTn>
+                              </p:par>
+                            </p:childTnLst>
+                          </p:cTn>
+                        </p:par>
+                      </p:childTnLst>
+                    </p:cTn>
+                  </p:par>
+                  <p:par>
+                    <p:cTn id="9" fill="hold">
+                      <p:stCondLst>
+                        <p:cond delay="indefinite"/>
+                      </p:stCondLst>
+                      <p:childTnLst>
+                        <p:par>
+                          <p:cTn id="10" fill="hold">
+                            <p:stCondLst>
+                              <p:cond delay="0"/>
+                            </p:stCondLst>
+                            <p:childTnLst>
+                              <p:par>
+                                <p:cTn id="11" presetID="1" presetClass="entr" presetSubtype="0" fill="hold" nodeType="clickEffect">
+                                  <p:stCondLst>
+                                    <p:cond delay="0"/>
+                                  </p:stCondLst>
+                                  <p:childTnLst>
+                                    <p:set>
+                                      <p:cBhvr>
+                                        <p:cTn id="12" dur="1" fill="hold">
+                                          <p:stCondLst>
+                                            <p:cond delay="0"/>
+                                          </p:stCondLst>
+                                        </p:cTn>
+                                        <p:tgtEl>
+                                          <p:spTgt spid="10"/>
+                                        </p:tgtEl>
+                                        <p:attrNameLst>
+                                          <p:attrName>style.visibility</p:attrName>
+                                        </p:attrNameLst>
+                                      </p:cBhvr>
+                                      <p:to>
+                                        <p:strVal val="visible"/>
+                                      </p:to>
+                                    </p:set>
+                                  </p:childTnLst>
+                                </p:cTn>
+                              </p:par>
+                              <p:par>
+                                <p:cTn id="13" presetID="1" presetClass="entr" presetSubtype="0" fill="hold" nodeType="withEffect">
+                                  <p:stCondLst>
+                                    <p:cond delay="0"/>
+                                  </p:stCondLst>
+                                  <p:childTnLst>
+                                    <p:set>
+                                      <p:cBhvr>
+                                        <p:cTn id="14" dur="1" fill="hold">
+                                          <p:stCondLst>
+                                            <p:cond delay="0"/>
+                                          </p:stCondLst>
+                                        </p:cTn>
+                                        <p:tgtEl>
+                                          <p:spTgt spid="11"/>
+                                        </p:tgtEl>
+                                        <p:attrNameLst>
+                                          <p:attrName>style.visibility</p:attrName>
+                                        </p:attrNameLst>
+                                      </p:cBhvr>
+                                      <p:to>
+                                        <p:strVal val="visible"/>
+                                      </p:to>
+                                    </p:set>
+                                  </p:childTnLst>
+                                </p:cTn>
+                              </p:par>
+                            </p:childTnLst>
+                          </p:cTn>
+                        </p:par>
+                      </p:childTnLst>
+                    </p:cTn>
+                  </p:par>
+                  <p:par>
+                    <p:cTn id="15" fill="hold">
+                      <p:stCondLst>
+                        <p:cond delay="indefinite"/>
+                      </p:stCondLst>
+                      <p:childTnLst>
+                        <p:par>
+                          <p:cTn id="16" fill="hold">
+                            <p:stCondLst>
+                              <p:cond delay="0"/>
+                            </p:stCondLst>
+                            <p:childTnLst>
+                              <p:par>
+                                <p:cTn id="17" presetID="1" presetClass="entr" presetSubtype="0" fill="hold" nodeType="clickEffect">
+                                  <p:stCondLst>
+                                    <p:cond delay="0"/>
+                                  </p:stCondLst>
+                                  <p:childTnLst>
+                                    <p:set>
+                                      <p:cBhvr>
+                                        <p:cTn id="18" dur="1" fill="hold">
+                                          <p:stCondLst>
+                                            <p:cond delay="0"/>
+                                          </p:stCondLst>
+                                        </p:cTn>
+                                        <p:tgtEl>
+                                          <p:spTgt spid="12"/>
                                         </p:tgtEl>
                                         <p:attrNameLst>
                                           <p:attrName>style.visibility</p:attrName>
@@ -24171,7 +24288,7 @@
       </mc:AlternateContent>
       <p:sp>
         <p:nvSpPr>
-          <p:cNvPr id="12" name="Rounded Rectangle 11"/>
+          <p:cNvPr id="12" name="s3_nen"/>
           <p:cNvSpPr/>
           <p:nvPr/>
         </p:nvSpPr>
@@ -24221,7 +24338,7 @@
         <mc:Choice xmlns:a14="http://schemas.microsoft.com/office/drawing/2010/main" Requires="a14">
           <p:sp>
             <p:nvSpPr>
-              <p:cNvPr id="13" name="TextBox 12"/>
+              <p:cNvPr id="13" name="s3_chu"/>
               <p:cNvSpPr txBox="1"/>
               <p:nvPr/>
             </p:nvSpPr>
@@ -24771,6 +24888,78 @@
                                         </p:cTn>
                                         <p:tgtEl>
                                           <p:spTgt spid="11"/>
+                                        </p:tgtEl>
+                                        <p:attrNameLst>
+                                          <p:attrName>style.visibility</p:attrName>
+                                        </p:attrNameLst>
+                                      </p:cBhvr>
+                                      <p:to>
+                                        <p:strVal val="visible"/>
+                                      </p:to>
+                                    </p:set>
+                                  </p:childTnLst>
+                                </p:cTn>
+                              </p:par>
+                            </p:childTnLst>
+                          </p:cTn>
+                        </p:par>
+                      </p:childTnLst>
+                    </p:cTn>
+                  </p:par>
+                  <p:par>
+                    <p:cTn id="15" fill="hold">
+                      <p:stCondLst>
+                        <p:cond delay="indefinite"/>
+                      </p:stCondLst>
+                      <p:childTnLst>
+                        <p:par>
+                          <p:cTn id="16" fill="hold">
+                            <p:stCondLst>
+                              <p:cond delay="0"/>
+                            </p:stCondLst>
+                            <p:childTnLst>
+                              <p:par>
+                                <p:cTn id="17" presetID="1" presetClass="entr" presetSubtype="0" fill="hold" nodeType="clickEffect">
+                                  <p:stCondLst>
+                                    <p:cond delay="0"/>
+                                  </p:stCondLst>
+                                  <p:childTnLst>
+                                    <p:set>
+                                      <p:cBhvr>
+                                        <p:cTn id="18" dur="1" fill="hold">
+                                          <p:stCondLst>
+                                            <p:cond delay="0"/>
+                                          </p:stCondLst>
+                                        </p:cTn>
+                                        <p:tgtEl>
+                                          <p:spTgt spid="12"/>
+                                        </p:tgtEl>
+                                        <p:attrNameLst>
+                                          <p:attrName>style.visibility</p:attrName>
+                                        </p:attrNameLst>
+                                      </p:cBhvr>
+                                      <p:to>
+                                        <p:strVal val="visible"/>
+                                      </p:to>
+                                    </p:set>
+                                  </p:childTnLst>
+                                </p:cTn>
+                              </p:par>
+                              <p:par>
+                                <p:cTn id="19" presetID="1" presetClass="entr" presetSubtype="0" fill="hold" nodeType="withEffect">
+                                  <p:stCondLst>
+                                    <p:cond delay="0"/>
+                                  </p:stCondLst>
+                                  <p:childTnLst>
+                                    <p:set>
+                                      <p:cBhvr>
+                                        <p:cTn id="20" dur="1" fill="hold">
+                                          <p:stCondLst>
+                                            <p:cond delay="0"/>
+                                          </p:stCondLst>
+                                        </p:cTn>
+                                        <p:tgtEl>
+                                          <p:spTgt spid="13"/>
                                         </p:tgtEl>
                                         <p:attrNameLst>
                                           <p:attrName>style.visibility</p:attrName>
@@ -29305,7 +29494,7 @@
         <mc:Choice xmlns:a14="http://schemas.microsoft.com/office/drawing/2010/main" Requires="a14">
           <p:sp>
             <p:nvSpPr>
-              <p:cNvPr id="8" name="TextBox 7"/>
+              <p:cNvPr id="8" name="s1_chu"/>
               <p:cNvSpPr txBox="1"/>
               <p:nvPr/>
             </p:nvSpPr>
@@ -29745,7 +29934,7 @@
       </mc:AlternateContent>
       <p:sp>
         <p:nvSpPr>
-          <p:cNvPr id="9" name="s1_nen"/>
+          <p:cNvPr id="9" name="s2_nen"/>
           <p:cNvSpPr/>
           <p:nvPr/>
         </p:nvSpPr>
@@ -29795,7 +29984,7 @@
         <mc:Choice xmlns:a14="http://schemas.microsoft.com/office/drawing/2010/main" Requires="a14">
           <p:sp>
             <p:nvSpPr>
-              <p:cNvPr id="10" name="s1_chu"/>
+              <p:cNvPr id="10" name="s2_chu"/>
               <p:cNvSpPr txBox="1"/>
               <p:nvPr/>
             </p:nvSpPr>
@@ -30082,7 +30271,7 @@
       </mc:AlternateContent>
       <p:sp>
         <p:nvSpPr>
-          <p:cNvPr id="11" name="s2_nen"/>
+          <p:cNvPr id="11" name="s3_nen"/>
           <p:cNvSpPr/>
           <p:nvPr/>
         </p:nvSpPr>
@@ -30132,7 +30321,7 @@
         <mc:Choice xmlns:a14="http://schemas.microsoft.com/office/drawing/2010/main" Requires="a14">
           <p:sp>
             <p:nvSpPr>
-              <p:cNvPr id="12" name="s2_chu"/>
+              <p:cNvPr id="12" name="s3_chu"/>
               <p:cNvSpPr txBox="1"/>
               <p:nvPr/>
             </p:nvSpPr>
@@ -30295,7 +30484,7 @@
       </mc:AlternateContent>
       <p:sp>
         <p:nvSpPr>
-          <p:cNvPr id="13" name="s3_nen"/>
+          <p:cNvPr id="13" name="s4_nen"/>
           <p:cNvSpPr/>
           <p:nvPr/>
         </p:nvSpPr>
@@ -30345,7 +30534,7 @@
         <mc:Choice xmlns:a14="http://schemas.microsoft.com/office/drawing/2010/main" Requires="a14">
           <p:sp>
             <p:nvSpPr>
-              <p:cNvPr id="14" name="s3_chu"/>
+              <p:cNvPr id="14" name="s4_chu"/>
               <p:cNvSpPr txBox="1"/>
               <p:nvPr/>
             </p:nvSpPr>
@@ -30637,6 +30826,51 @@
                                           </p:stCondLst>
                                         </p:cTn>
                                         <p:tgtEl>
+                                          <p:spTgt spid="8"/>
+                                        </p:tgtEl>
+                                        <p:attrNameLst>
+                                          <p:attrName>style.visibility</p:attrName>
+                                        </p:attrNameLst>
+                                      </p:cBhvr>
+                                      <p:to>
+                                        <p:strVal val="visible"/>
+                                      </p:to>
+                                    </p:set>
+                                  </p:childTnLst>
+                                </p:cTn>
+                              </p:par>
+                            </p:childTnLst>
+                          </p:cTn>
+                        </p:par>
+                      </p:childTnLst>
+                    </p:cTn>
+                  </p:par>
+                  <p:par>
+                    <p:cTn id="7" fill="hold">
+                      <p:stCondLst>
+                        <p:cond delay="indefinite"/>
+                      </p:stCondLst>
+                      <p:childTnLst>
+                        <p:par>
+                          <p:cTn id="8" fill="hold">
+                            <p:stCondLst>
+                              <p:cond delay="0"/>
+                            </p:stCondLst>
+                            <p:childTnLst>
+                              <p:par>
+                                <p:cTn id="9" presetID="1" presetClass="entr" presetSubtype="0" fill="hold" nodeType="clickEffect">
+                                  <p:stCondLst>
+                                    <p:cond delay="0"/>
+                                  </p:stCondLst>
+                                  <p:childTnLst>
+                                    <p:set>
+                                      <p:cBhvr>
+                                        <p:cTn id="10" dur="1" fill="hold">
+                                          <p:stCondLst>
+                                            <p:cond delay="0"/>
+                                          </p:stCondLst>
+                                        </p:cTn>
+                                        <p:tgtEl>
                                           <p:spTgt spid="9"/>
                                         </p:tgtEl>
                                         <p:attrNameLst>
@@ -30651,14 +30885,14 @@
                                 </p:cTn>
                               </p:par>
                               <p:par>
-                                <p:cTn id="7" presetID="1" presetClass="entr" presetSubtype="0" fill="hold" nodeType="withEffect">
+                                <p:cTn id="11" presetID="1" presetClass="entr" presetSubtype="0" fill="hold" nodeType="withEffect">
                                   <p:stCondLst>
                                     <p:cond delay="0"/>
                                   </p:stCondLst>
                                   <p:childTnLst>
                                     <p:set>
                                       <p:cBhvr>
-                                        <p:cTn id="8" dur="1" fill="hold">
+                                        <p:cTn id="12" dur="1" fill="hold">
                                           <p:stCondLst>
                                             <p:cond delay="0"/>
                                           </p:stCondLst>
@@ -30684,26 +30918,26 @@
                     </p:cTn>
                   </p:par>
                   <p:par>
-                    <p:cTn id="9" fill="hold">
+                    <p:cTn id="13" fill="hold">
                       <p:stCondLst>
                         <p:cond delay="indefinite"/>
                       </p:stCondLst>
                       <p:childTnLst>
                         <p:par>
-                          <p:cTn id="10" fill="hold">
+                          <p:cTn id="14" fill="hold">
                             <p:stCondLst>
                               <p:cond delay="0"/>
                             </p:stCondLst>
                             <p:childTnLst>
                               <p:par>
-                                <p:cTn id="11" presetID="1" presetClass="entr" presetSubtype="0" fill="hold" nodeType="clickEffect">
+                                <p:cTn id="15" presetID="1" presetClass="entr" presetSubtype="0" fill="hold" nodeType="clickEffect">
                                   <p:stCondLst>
                                     <p:cond delay="0"/>
                                   </p:stCondLst>
                                   <p:childTnLst>
                                     <p:set>
                                       <p:cBhvr>
-                                        <p:cTn id="12" dur="1" fill="hold">
+                                        <p:cTn id="16" dur="1" fill="hold">
                                           <p:stCondLst>
                                             <p:cond delay="0"/>
                                           </p:stCondLst>
@@ -30723,14 +30957,14 @@
                                 </p:cTn>
                               </p:par>
                               <p:par>
-                                <p:cTn id="13" presetID="1" presetClass="entr" presetSubtype="0" fill="hold" nodeType="withEffect">
+                                <p:cTn id="17" presetID="1" presetClass="entr" presetSubtype="0" fill="hold" nodeType="withEffect">
                                   <p:stCondLst>
                                     <p:cond delay="0"/>
                                   </p:stCondLst>
                                   <p:childTnLst>
                                     <p:set>
                                       <p:cBhvr>
-                                        <p:cTn id="14" dur="1" fill="hold">
+                                        <p:cTn id="18" dur="1" fill="hold">
                                           <p:stCondLst>
                                             <p:cond delay="0"/>
                                           </p:stCondLst>
@@ -30756,26 +30990,26 @@
                     </p:cTn>
                   </p:par>
                   <p:par>
-                    <p:cTn id="15" fill="hold">
+                    <p:cTn id="19" fill="hold">
                       <p:stCondLst>
                         <p:cond delay="indefinite"/>
                       </p:stCondLst>
                       <p:childTnLst>
                         <p:par>
-                          <p:cTn id="16" fill="hold">
+                          <p:cTn id="20" fill="hold">
                             <p:stCondLst>
                               <p:cond delay="0"/>
                             </p:stCondLst>
                             <p:childTnLst>
                               <p:par>
-                                <p:cTn id="17" presetID="1" presetClass="entr" presetSubtype="0" fill="hold" nodeType="clickEffect">
+                                <p:cTn id="21" presetID="1" presetClass="entr" presetSubtype="0" fill="hold" nodeType="clickEffect">
                                   <p:stCondLst>
                                     <p:cond delay="0"/>
                                   </p:stCondLst>
                                   <p:childTnLst>
                                     <p:set>
                                       <p:cBhvr>
-                                        <p:cTn id="18" dur="1" fill="hold">
+                                        <p:cTn id="22" dur="1" fill="hold">
                                           <p:stCondLst>
                                             <p:cond delay="0"/>
                                           </p:stCondLst>
@@ -30795,14 +31029,14 @@
                                 </p:cTn>
                               </p:par>
                               <p:par>
-                                <p:cTn id="19" presetID="1" presetClass="entr" presetSubtype="0" fill="hold" nodeType="withEffect">
+                                <p:cTn id="23" presetID="1" presetClass="entr" presetSubtype="0" fill="hold" nodeType="withEffect">
                                   <p:stCondLst>
                                     <p:cond delay="0"/>
                                   </p:stCondLst>
                                   <p:childTnLst>
                                     <p:set>
                                       <p:cBhvr>
-                                        <p:cTn id="20" dur="1" fill="hold">
+                                        <p:cTn id="24" dur="1" fill="hold">
                                           <p:stCondLst>
                                             <p:cond delay="0"/>
                                           </p:stCondLst>
@@ -31091,7 +31325,7 @@
             <p:spPr>
               <a:xfrm>
                 <a:off x="548640" y="1371600"/>
-                <a:ext cx="11064240" cy="1493520"/>
+                <a:ext cx="11064240" cy="783335"/>
               </a:xfrm>
               <a:prstGeom prst="rect">
                 <a:avLst/>
@@ -31474,220 +31708,6 @@
                   <a:t>.</a:t>
                 </a:r>
               </a:p>
-              <a:p>
-                <a:pPr algn="l">
-                  <a:spcAft>
-                    <a:spcPts val="800"/>
-                  </a:spcAft>
-                </a:pPr>
-                <a:r>
-                  <a:rPr sz="2000" b="1">
-                    <a:solidFill>
-                      <a:srgbClr val="1E293B"/>
-                    </a:solidFill>
-                    <a:latin typeface="Calibri"/>
-                  </a:rPr>
-                  <a:t>4.7.</a:t>
-                </a:r>
-                <a:r>
-                  <a:rPr sz="2000">
-                    <a:solidFill>
-                      <a:srgbClr val="1E293B"/>
-                    </a:solidFill>
-                    <a:latin typeface="Calibri"/>
-                  </a:rPr>
-                  <a:t> Cho hình bình hành </a:t>
-                </a:r>
-                <a14:m>
-                  <m:oMath xmlns:m="http://schemas.openxmlformats.org/officeDocument/2006/math">
-                    <m:r>
-                      <a:rPr lang="vi-VN" sz="2000" b="0">
-                        <a:solidFill>
-                          <a:srgbClr val="1E293B"/>
-                        </a:solidFill>
-                        <a:latin typeface="Cambria Math" panose="02040503050406030204" pitchFamily="18" charset="0"/>
-                      </a:rPr>
-                      <m:t>ABCD</m:t>
-                    </m:r>
-                  </m:oMath>
-                </a14:m>
-                <a:r>
-                  <a:rPr sz="2000">
-                    <a:solidFill>
-                      <a:srgbClr val="1E293B"/>
-                    </a:solidFill>
-                    <a:latin typeface="Calibri"/>
-                  </a:rPr>
-                  <a:t>. Hãy tìm điểm </a:t>
-                </a:r>
-                <a14:m>
-                  <m:oMath xmlns:m="http://schemas.openxmlformats.org/officeDocument/2006/math">
-                    <m:r>
-                      <a:rPr lang="vi-VN" sz="2000" b="0">
-                        <a:solidFill>
-                          <a:srgbClr val="1E293B"/>
-                        </a:solidFill>
-                        <a:latin typeface="Cambria Math" panose="02040503050406030204" pitchFamily="18" charset="0"/>
-                      </a:rPr>
-                      <m:t>M</m:t>
-                    </m:r>
-                  </m:oMath>
-                </a14:m>
-                <a:r>
-                  <a:rPr sz="2000">
-                    <a:solidFill>
-                      <a:srgbClr val="1E293B"/>
-                    </a:solidFill>
-                    <a:latin typeface="Calibri"/>
-                  </a:rPr>
-                  <a:t> để </a:t>
-                </a:r>
-                <a14:m>
-                  <m:oMath xmlns:m="http://schemas.openxmlformats.org/officeDocument/2006/math">
-                    <m:acc>
-                      <m:accPr>
-                        <m:chr m:val="⃗"/>
-                      </m:accPr>
-                      <m:e>
-                        <m:r>
-                          <a:rPr lang="vi-VN" sz="2000" b="0">
-                            <a:solidFill>
-                              <a:srgbClr val="1E293B"/>
-                            </a:solidFill>
-                            <a:latin typeface="Cambria Math" panose="02040503050406030204" pitchFamily="18" charset="0"/>
-                          </a:rPr>
-                          <m:t>BM</m:t>
-                        </m:r>
-                      </m:e>
-                    </m:acc>
-                  </m:oMath>
-                </a14:m>
-                <a:r>
-                  <a:rPr sz="2000">
-                    <a:solidFill>
-                      <a:srgbClr val="1E293B"/>
-                    </a:solidFill>
-                    <a:latin typeface="Calibri"/>
-                  </a:rPr>
-                  <a:t> = </a:t>
-                </a:r>
-                <a14:m>
-                  <m:oMath xmlns:m="http://schemas.openxmlformats.org/officeDocument/2006/math">
-                    <m:acc>
-                      <m:accPr>
-                        <m:chr m:val="⃗"/>
-                      </m:accPr>
-                      <m:e>
-                        <m:r>
-                          <a:rPr lang="vi-VN" sz="2000" b="0">
-                            <a:solidFill>
-                              <a:srgbClr val="1E293B"/>
-                            </a:solidFill>
-                            <a:latin typeface="Cambria Math" panose="02040503050406030204" pitchFamily="18" charset="0"/>
-                          </a:rPr>
-                          <m:t>AB</m:t>
-                        </m:r>
-                      </m:e>
-                    </m:acc>
-                  </m:oMath>
-                </a14:m>
-                <a:r>
-                  <a:rPr sz="2000">
-                    <a:solidFill>
-                      <a:srgbClr val="1E293B"/>
-                    </a:solidFill>
-                    <a:latin typeface="Calibri"/>
-                  </a:rPr>
-                  <a:t> + </a:t>
-                </a:r>
-                <a14:m>
-                  <m:oMath xmlns:m="http://schemas.openxmlformats.org/officeDocument/2006/math">
-                    <m:acc>
-                      <m:accPr>
-                        <m:chr m:val="⃗"/>
-                      </m:accPr>
-                      <m:e>
-                        <m:r>
-                          <a:rPr lang="vi-VN" sz="2000" b="0">
-                            <a:solidFill>
-                              <a:srgbClr val="1E293B"/>
-                            </a:solidFill>
-                            <a:latin typeface="Cambria Math" panose="02040503050406030204" pitchFamily="18" charset="0"/>
-                          </a:rPr>
-                          <m:t>AD</m:t>
-                        </m:r>
-                      </m:e>
-                    </m:acc>
-                  </m:oMath>
-                </a14:m>
-                <a:r>
-                  <a:rPr sz="2000">
-                    <a:solidFill>
-                      <a:srgbClr val="1E293B"/>
-                    </a:solidFill>
-                    <a:latin typeface="Calibri"/>
-                  </a:rPr>
-                  <a:t>. Tìm mối quan hệ giữa hai vectơ </a:t>
-                </a:r>
-                <a14:m>
-                  <m:oMath xmlns:m="http://schemas.openxmlformats.org/officeDocument/2006/math">
-                    <m:acc>
-                      <m:accPr>
-                        <m:chr m:val="⃗"/>
-                      </m:accPr>
-                      <m:e>
-                        <m:r>
-                          <a:rPr lang="vi-VN" sz="2000" b="0">
-                            <a:solidFill>
-                              <a:srgbClr val="1E293B"/>
-                            </a:solidFill>
-                            <a:latin typeface="Cambria Math" panose="02040503050406030204" pitchFamily="18" charset="0"/>
-                          </a:rPr>
-                          <m:t>CD</m:t>
-                        </m:r>
-                      </m:e>
-                    </m:acc>
-                  </m:oMath>
-                </a14:m>
-                <a:r>
-                  <a:rPr sz="2000">
-                    <a:solidFill>
-                      <a:srgbClr val="1E293B"/>
-                    </a:solidFill>
-                    <a:latin typeface="Calibri"/>
-                  </a:rPr>
-                  <a:t> và </a:t>
-                </a:r>
-                <a14:m>
-                  <m:oMath xmlns:m="http://schemas.openxmlformats.org/officeDocument/2006/math">
-                    <m:acc>
-                      <m:accPr>
-                        <m:chr m:val="⃗"/>
-                      </m:accPr>
-                      <m:e>
-                        <m:r>
-                          <a:rPr lang="vi-VN" sz="2000" b="0">
-                            <a:solidFill>
-                              <a:srgbClr val="1E293B"/>
-                            </a:solidFill>
-                            <a:latin typeface="Cambria Math" panose="02040503050406030204" pitchFamily="18" charset="0"/>
-                          </a:rPr>
-                          <m:t>CM</m:t>
-                        </m:r>
-                      </m:e>
-                    </m:acc>
-                  </m:oMath>
-                </a14:m>
-                <a:r>
-                  <a:rPr sz="2000">
-                    <a:solidFill>
-                      <a:srgbClr val="1E293B"/>
-                    </a:solidFill>
-                    <a:latin typeface="Calibri"/>
-                  </a:rPr>
-                  <a:t>.</a:t>
-                </a:r>
-              </a:p>
             </p:txBody>
           </p:sp>
         </mc:Choice>
@@ -31701,7 +31721,7 @@
             <p:spPr>
               <a:xfrm>
                 <a:off x="548640" y="1371600"/>
-                <a:ext cx="11064240" cy="1493520"/>
+                <a:ext cx="11064240" cy="783335"/>
               </a:xfrm>
               <a:prstGeom prst="rect">
                 <a:avLst/>
@@ -31868,122 +31888,6 @@
                   <a:t>.</a:t>
                 </a:r>
               </a:p>
-              <a:p>
-                <a:pPr algn="l">
-                  <a:spcAft>
-                    <a:spcPts val="800"/>
-                  </a:spcAft>
-                </a:pPr>
-                <a:r>
-                  <a:rPr sz="2000" b="1">
-                    <a:solidFill>
-                      <a:srgbClr val="1E293B"/>
-                    </a:solidFill>
-                    <a:latin typeface="Calibri"/>
-                  </a:rPr>
-                  <a:t>4.7.</a:t>
-                </a:r>
-                <a:r>
-                  <a:rPr sz="2000">
-                    <a:solidFill>
-                      <a:srgbClr val="1E293B"/>
-                    </a:solidFill>
-                    <a:latin typeface="Calibri"/>
-                  </a:rPr>
-                  <a:t> Cho hình bình hành </a:t>
-                </a:r>
-                <a:r>
-                  <a:rPr lang="vi-VN"/>
-                  <a:t>ABCD</a:t>
-                </a:r>
-                <a:r>
-                  <a:rPr sz="2000">
-                    <a:solidFill>
-                      <a:srgbClr val="1E293B"/>
-                    </a:solidFill>
-                    <a:latin typeface="Calibri"/>
-                  </a:rPr>
-                  <a:t>. Hãy tìm điểm </a:t>
-                </a:r>
-                <a:r>
-                  <a:rPr lang="vi-VN"/>
-                  <a:t>M</a:t>
-                </a:r>
-                <a:r>
-                  <a:rPr sz="2000">
-                    <a:solidFill>
-                      <a:srgbClr val="1E293B"/>
-                    </a:solidFill>
-                    <a:latin typeface="Calibri"/>
-                  </a:rPr>
-                  <a:t> để </a:t>
-                </a:r>
-                <a:r>
-                  <a:rPr lang="vi-VN"/>
-                  <a:t>\overrightarrow{BM}</a:t>
-                </a:r>
-                <a:r>
-                  <a:rPr sz="2000">
-                    <a:solidFill>
-                      <a:srgbClr val="1E293B"/>
-                    </a:solidFill>
-                    <a:latin typeface="Calibri"/>
-                  </a:rPr>
-                  <a:t> = </a:t>
-                </a:r>
-                <a:r>
-                  <a:rPr lang="vi-VN"/>
-                  <a:t>\overrightarrow{AB}</a:t>
-                </a:r>
-                <a:r>
-                  <a:rPr sz="2000">
-                    <a:solidFill>
-                      <a:srgbClr val="1E293B"/>
-                    </a:solidFill>
-                    <a:latin typeface="Calibri"/>
-                  </a:rPr>
-                  <a:t> + </a:t>
-                </a:r>
-                <a:r>
-                  <a:rPr lang="vi-VN"/>
-                  <a:t>\overrightarrow{AD}</a:t>
-                </a:r>
-                <a:r>
-                  <a:rPr sz="2000">
-                    <a:solidFill>
-                      <a:srgbClr val="1E293B"/>
-                    </a:solidFill>
-                    <a:latin typeface="Calibri"/>
-                  </a:rPr>
-                  <a:t>. Tìm mối quan hệ giữa hai vectơ </a:t>
-                </a:r>
-                <a:r>
-                  <a:rPr lang="vi-VN"/>
-                  <a:t>\overrightarrow{CD}</a:t>
-                </a:r>
-                <a:r>
-                  <a:rPr sz="2000">
-                    <a:solidFill>
-                      <a:srgbClr val="1E293B"/>
-                    </a:solidFill>
-                    <a:latin typeface="Calibri"/>
-                  </a:rPr>
-                  <a:t> và </a:t>
-                </a:r>
-                <a:r>
-                  <a:rPr lang="vi-VN"/>
-                  <a:t>\overrightarrow{CM}</a:t>
-                </a:r>
-                <a:r>
-                  <a:rPr sz="2000">
-                    <a:solidFill>
-                      <a:srgbClr val="1E293B"/>
-                    </a:solidFill>
-                    <a:latin typeface="Calibri"/>
-                  </a:rPr>
-                  <a:t>.</a:t>
-                </a:r>
-              </a:p>
             </p:txBody>
           </p:sp>
         </mc:Fallback>
@@ -31996,7 +31900,7 @@
         </p:nvSpPr>
         <p:spPr>
           <a:xfrm>
-            <a:off x="548640" y="3002280"/>
+            <a:off x="548640" y="2218944"/>
             <a:ext cx="11064240" cy="569976"/>
           </a:xfrm>
           <a:prstGeom prst="roundRect">
@@ -32046,7 +31950,7 @@
             </p:nvSpPr>
             <p:spPr>
               <a:xfrm>
-                <a:off x="713232" y="3038856"/>
+                <a:off x="713232" y="2255520"/>
                 <a:ext cx="10735056" cy="496824"/>
               </a:xfrm>
               <a:prstGeom prst="rect">
@@ -32386,7 +32290,7 @@
             </p:nvSpPr>
             <p:spPr>
               <a:xfrm>
-                <a:off x="713232" y="3038856"/>
+                <a:off x="713232" y="2255520"/>
                 <a:ext cx="10735056" cy="496824"/>
               </a:xfrm>
               <a:prstGeom prst="rect">
@@ -32558,15 +32462,397 @@
           </p:sp>
         </mc:Fallback>
       </mc:AlternateContent>
+      <mc:AlternateContent xmlns:mc="http://schemas.openxmlformats.org/markup-compatibility/2006">
+        <mc:Choice xmlns:a14="http://schemas.microsoft.com/office/drawing/2010/main" Requires="a14">
+          <p:sp>
+            <p:nvSpPr>
+              <p:cNvPr id="10" name="s2_chu"/>
+              <p:cNvSpPr txBox="1"/>
+              <p:nvPr/>
+            </p:nvSpPr>
+            <p:spPr>
+              <a:xfrm>
+                <a:off x="548640" y="2852927"/>
+                <a:ext cx="11064240" cy="783335"/>
+              </a:xfrm>
+              <a:prstGeom prst="rect">
+                <a:avLst/>
+              </a:prstGeom>
+              <a:noFill/>
+            </p:spPr>
+            <p:txBody>
+              <a:bodyPr wrap="square" anchor="t" lIns="45720" rIns="45720">
+                <a:spAutoFit/>
+              </a:bodyPr>
+              <a:lstStyle/>
+              <a:p>
+                <a:pPr algn="l">
+                  <a:spcAft>
+                    <a:spcPts val="800"/>
+                  </a:spcAft>
+                </a:pPr>
+                <a:r>
+                  <a:rPr sz="2000" b="1">
+                    <a:solidFill>
+                      <a:srgbClr val="1E293B"/>
+                    </a:solidFill>
+                    <a:latin typeface="Calibri"/>
+                  </a:rPr>
+                  <a:t>4.7.</a:t>
+                </a:r>
+                <a:r>
+                  <a:rPr sz="2000">
+                    <a:solidFill>
+                      <a:srgbClr val="1E293B"/>
+                    </a:solidFill>
+                    <a:latin typeface="Calibri"/>
+                  </a:rPr>
+                  <a:t> Cho hình bình hành </a:t>
+                </a:r>
+                <a14:m>
+                  <m:oMath xmlns:m="http://schemas.openxmlformats.org/officeDocument/2006/math">
+                    <m:r>
+                      <a:rPr lang="vi-VN" sz="2000" b="0">
+                        <a:solidFill>
+                          <a:srgbClr val="1E293B"/>
+                        </a:solidFill>
+                        <a:latin typeface="Cambria Math" panose="02040503050406030204" pitchFamily="18" charset="0"/>
+                      </a:rPr>
+                      <m:t>ABCD</m:t>
+                    </m:r>
+                  </m:oMath>
+                </a14:m>
+                <a:r>
+                  <a:rPr sz="2000">
+                    <a:solidFill>
+                      <a:srgbClr val="1E293B"/>
+                    </a:solidFill>
+                    <a:latin typeface="Calibri"/>
+                  </a:rPr>
+                  <a:t>. Hãy tìm điểm </a:t>
+                </a:r>
+                <a14:m>
+                  <m:oMath xmlns:m="http://schemas.openxmlformats.org/officeDocument/2006/math">
+                    <m:r>
+                      <a:rPr lang="vi-VN" sz="2000" b="0">
+                        <a:solidFill>
+                          <a:srgbClr val="1E293B"/>
+                        </a:solidFill>
+                        <a:latin typeface="Cambria Math" panose="02040503050406030204" pitchFamily="18" charset="0"/>
+                      </a:rPr>
+                      <m:t>M</m:t>
+                    </m:r>
+                  </m:oMath>
+                </a14:m>
+                <a:r>
+                  <a:rPr sz="2000">
+                    <a:solidFill>
+                      <a:srgbClr val="1E293B"/>
+                    </a:solidFill>
+                    <a:latin typeface="Calibri"/>
+                  </a:rPr>
+                  <a:t> để </a:t>
+                </a:r>
+                <a14:m>
+                  <m:oMath xmlns:m="http://schemas.openxmlformats.org/officeDocument/2006/math">
+                    <m:acc>
+                      <m:accPr>
+                        <m:chr m:val="⃗"/>
+                      </m:accPr>
+                      <m:e>
+                        <m:r>
+                          <a:rPr lang="vi-VN" sz="2000" b="0">
+                            <a:solidFill>
+                              <a:srgbClr val="1E293B"/>
+                            </a:solidFill>
+                            <a:latin typeface="Cambria Math" panose="02040503050406030204" pitchFamily="18" charset="0"/>
+                          </a:rPr>
+                          <m:t>BM</m:t>
+                        </m:r>
+                      </m:e>
+                    </m:acc>
+                  </m:oMath>
+                </a14:m>
+                <a:r>
+                  <a:rPr sz="2000">
+                    <a:solidFill>
+                      <a:srgbClr val="1E293B"/>
+                    </a:solidFill>
+                    <a:latin typeface="Calibri"/>
+                  </a:rPr>
+                  <a:t> = </a:t>
+                </a:r>
+                <a14:m>
+                  <m:oMath xmlns:m="http://schemas.openxmlformats.org/officeDocument/2006/math">
+                    <m:acc>
+                      <m:accPr>
+                        <m:chr m:val="⃗"/>
+                      </m:accPr>
+                      <m:e>
+                        <m:r>
+                          <a:rPr lang="vi-VN" sz="2000" b="0">
+                            <a:solidFill>
+                              <a:srgbClr val="1E293B"/>
+                            </a:solidFill>
+                            <a:latin typeface="Cambria Math" panose="02040503050406030204" pitchFamily="18" charset="0"/>
+                          </a:rPr>
+                          <m:t>AB</m:t>
+                        </m:r>
+                      </m:e>
+                    </m:acc>
+                  </m:oMath>
+                </a14:m>
+                <a:r>
+                  <a:rPr sz="2000">
+                    <a:solidFill>
+                      <a:srgbClr val="1E293B"/>
+                    </a:solidFill>
+                    <a:latin typeface="Calibri"/>
+                  </a:rPr>
+                  <a:t> + </a:t>
+                </a:r>
+                <a14:m>
+                  <m:oMath xmlns:m="http://schemas.openxmlformats.org/officeDocument/2006/math">
+                    <m:acc>
+                      <m:accPr>
+                        <m:chr m:val="⃗"/>
+                      </m:accPr>
+                      <m:e>
+                        <m:r>
+                          <a:rPr lang="vi-VN" sz="2000" b="0">
+                            <a:solidFill>
+                              <a:srgbClr val="1E293B"/>
+                            </a:solidFill>
+                            <a:latin typeface="Cambria Math" panose="02040503050406030204" pitchFamily="18" charset="0"/>
+                          </a:rPr>
+                          <m:t>AD</m:t>
+                        </m:r>
+                      </m:e>
+                    </m:acc>
+                  </m:oMath>
+                </a14:m>
+                <a:r>
+                  <a:rPr sz="2000">
+                    <a:solidFill>
+                      <a:srgbClr val="1E293B"/>
+                    </a:solidFill>
+                    <a:latin typeface="Calibri"/>
+                  </a:rPr>
+                  <a:t>. Tìm mối quan hệ giữa hai vectơ </a:t>
+                </a:r>
+                <a14:m>
+                  <m:oMath xmlns:m="http://schemas.openxmlformats.org/officeDocument/2006/math">
+                    <m:acc>
+                      <m:accPr>
+                        <m:chr m:val="⃗"/>
+                      </m:accPr>
+                      <m:e>
+                        <m:r>
+                          <a:rPr lang="vi-VN" sz="2000" b="0">
+                            <a:solidFill>
+                              <a:srgbClr val="1E293B"/>
+                            </a:solidFill>
+                            <a:latin typeface="Cambria Math" panose="02040503050406030204" pitchFamily="18" charset="0"/>
+                          </a:rPr>
+                          <m:t>CD</m:t>
+                        </m:r>
+                      </m:e>
+                    </m:acc>
+                  </m:oMath>
+                </a14:m>
+                <a:r>
+                  <a:rPr sz="2000">
+                    <a:solidFill>
+                      <a:srgbClr val="1E293B"/>
+                    </a:solidFill>
+                    <a:latin typeface="Calibri"/>
+                  </a:rPr>
+                  <a:t> và </a:t>
+                </a:r>
+                <a14:m>
+                  <m:oMath xmlns:m="http://schemas.openxmlformats.org/officeDocument/2006/math">
+                    <m:acc>
+                      <m:accPr>
+                        <m:chr m:val="⃗"/>
+                      </m:accPr>
+                      <m:e>
+                        <m:r>
+                          <a:rPr lang="vi-VN" sz="2000" b="0">
+                            <a:solidFill>
+                              <a:srgbClr val="1E293B"/>
+                            </a:solidFill>
+                            <a:latin typeface="Cambria Math" panose="02040503050406030204" pitchFamily="18" charset="0"/>
+                          </a:rPr>
+                          <m:t>CM</m:t>
+                        </m:r>
+                      </m:e>
+                    </m:acc>
+                  </m:oMath>
+                </a14:m>
+                <a:r>
+                  <a:rPr sz="2000">
+                    <a:solidFill>
+                      <a:srgbClr val="1E293B"/>
+                    </a:solidFill>
+                    <a:latin typeface="Calibri"/>
+                  </a:rPr>
+                  <a:t>.</a:t>
+                </a:r>
+              </a:p>
+            </p:txBody>
+          </p:sp>
+        </mc:Choice>
+        <mc:Fallback>
+          <p:sp>
+            <p:nvSpPr>
+              <p:cNvPr id="10" name="TextBox 9"/>
+              <p:cNvSpPr txBox="1"/>
+              <p:nvPr/>
+            </p:nvSpPr>
+            <p:spPr>
+              <a:xfrm>
+                <a:off x="548640" y="2852927"/>
+                <a:ext cx="11064240" cy="783335"/>
+              </a:xfrm>
+              <a:prstGeom prst="rect">
+                <a:avLst/>
+              </a:prstGeom>
+              <a:noFill/>
+            </p:spPr>
+            <p:txBody>
+              <a:bodyPr wrap="square" anchor="t" lIns="45720" rIns="45720">
+                <a:spAutoFit/>
+              </a:bodyPr>
+              <a:lstStyle/>
+              <a:p>
+                <a:pPr algn="l">
+                  <a:spcAft>
+                    <a:spcPts val="800"/>
+                  </a:spcAft>
+                </a:pPr>
+                <a:r>
+                  <a:rPr sz="2000" b="1">
+                    <a:solidFill>
+                      <a:srgbClr val="1E293B"/>
+                    </a:solidFill>
+                    <a:latin typeface="Calibri"/>
+                  </a:rPr>
+                  <a:t>4.7.</a:t>
+                </a:r>
+                <a:r>
+                  <a:rPr sz="2000">
+                    <a:solidFill>
+                      <a:srgbClr val="1E293B"/>
+                    </a:solidFill>
+                    <a:latin typeface="Calibri"/>
+                  </a:rPr>
+                  <a:t> Cho hình bình hành </a:t>
+                </a:r>
+                <a:r>
+                  <a:rPr lang="vi-VN"/>
+                  <a:t>ABCD</a:t>
+                </a:r>
+                <a:r>
+                  <a:rPr sz="2000">
+                    <a:solidFill>
+                      <a:srgbClr val="1E293B"/>
+                    </a:solidFill>
+                    <a:latin typeface="Calibri"/>
+                  </a:rPr>
+                  <a:t>. Hãy tìm điểm </a:t>
+                </a:r>
+                <a:r>
+                  <a:rPr lang="vi-VN"/>
+                  <a:t>M</a:t>
+                </a:r>
+                <a:r>
+                  <a:rPr sz="2000">
+                    <a:solidFill>
+                      <a:srgbClr val="1E293B"/>
+                    </a:solidFill>
+                    <a:latin typeface="Calibri"/>
+                  </a:rPr>
+                  <a:t> để </a:t>
+                </a:r>
+                <a:r>
+                  <a:rPr lang="vi-VN"/>
+                  <a:t>\overrightarrow{BM}</a:t>
+                </a:r>
+                <a:r>
+                  <a:rPr sz="2000">
+                    <a:solidFill>
+                      <a:srgbClr val="1E293B"/>
+                    </a:solidFill>
+                    <a:latin typeface="Calibri"/>
+                  </a:rPr>
+                  <a:t> = </a:t>
+                </a:r>
+                <a:r>
+                  <a:rPr lang="vi-VN"/>
+                  <a:t>\overrightarrow{AB}</a:t>
+                </a:r>
+                <a:r>
+                  <a:rPr sz="2000">
+                    <a:solidFill>
+                      <a:srgbClr val="1E293B"/>
+                    </a:solidFill>
+                    <a:latin typeface="Calibri"/>
+                  </a:rPr>
+                  <a:t> + </a:t>
+                </a:r>
+                <a:r>
+                  <a:rPr lang="vi-VN"/>
+                  <a:t>\overrightarrow{AD}</a:t>
+                </a:r>
+                <a:r>
+                  <a:rPr sz="2000">
+                    <a:solidFill>
+                      <a:srgbClr val="1E293B"/>
+                    </a:solidFill>
+                    <a:latin typeface="Calibri"/>
+                  </a:rPr>
+                  <a:t>. Tìm mối quan hệ giữa hai vectơ </a:t>
+                </a:r>
+                <a:r>
+                  <a:rPr lang="vi-VN"/>
+                  <a:t>\overrightarrow{CD}</a:t>
+                </a:r>
+                <a:r>
+                  <a:rPr sz="2000">
+                    <a:solidFill>
+                      <a:srgbClr val="1E293B"/>
+                    </a:solidFill>
+                    <a:latin typeface="Calibri"/>
+                  </a:rPr>
+                  <a:t> và </a:t>
+                </a:r>
+                <a:r>
+                  <a:rPr lang="vi-VN"/>
+                  <a:t>\overrightarrow{CM}</a:t>
+                </a:r>
+                <a:r>
+                  <a:rPr sz="2000">
+                    <a:solidFill>
+                      <a:srgbClr val="1E293B"/>
+                    </a:solidFill>
+                    <a:latin typeface="Calibri"/>
+                  </a:rPr>
+                  <a:t>.</a:t>
+                </a:r>
+              </a:p>
+            </p:txBody>
+          </p:sp>
+        </mc:Fallback>
+      </mc:AlternateContent>
       <p:sp>
         <p:nvSpPr>
-          <p:cNvPr id="10" name="s2_nen"/>
+          <p:cNvPr id="11" name="s3_nen"/>
           <p:cNvSpPr/>
           <p:nvPr/>
         </p:nvSpPr>
         <p:spPr>
           <a:xfrm>
-            <a:off x="548640" y="3663695"/>
+            <a:off x="548640" y="3700271"/>
             <a:ext cx="11064240" cy="874775"/>
           </a:xfrm>
           <a:prstGeom prst="roundRect">
@@ -32610,13 +32896,13 @@
         <mc:Choice xmlns:a14="http://schemas.microsoft.com/office/drawing/2010/main" Requires="a14">
           <p:sp>
             <p:nvSpPr>
-              <p:cNvPr id="11" name="s2_chu"/>
+              <p:cNvPr id="12" name="s3_chu"/>
               <p:cNvSpPr txBox="1"/>
               <p:nvPr/>
             </p:nvSpPr>
             <p:spPr>
               <a:xfrm>
-                <a:off x="713232" y="3700271"/>
+                <a:off x="713232" y="3736847"/>
                 <a:ext cx="10735056" cy="801623"/>
               </a:xfrm>
               <a:prstGeom prst="rect">
@@ -32951,13 +33237,13 @@
         <mc:Fallback>
           <p:sp>
             <p:nvSpPr>
-              <p:cNvPr id="11" name="TextBox 10"/>
+              <p:cNvPr id="12" name="TextBox 11"/>
               <p:cNvSpPr txBox="1"/>
               <p:nvPr/>
             </p:nvSpPr>
             <p:spPr>
               <a:xfrm>
-                <a:off x="713232" y="3700271"/>
+                <a:off x="713232" y="3736847"/>
                 <a:ext cx="10735056" cy="801623"/>
               </a:xfrm>
               <a:prstGeom prst="rect">
@@ -33266,21 +33552,66 @@
                                   </p:childTnLst>
                                 </p:cTn>
                               </p:par>
+                            </p:childTnLst>
+                          </p:cTn>
+                        </p:par>
+                      </p:childTnLst>
+                    </p:cTn>
+                  </p:par>
+                  <p:par>
+                    <p:cTn id="13" fill="hold">
+                      <p:stCondLst>
+                        <p:cond delay="indefinite"/>
+                      </p:stCondLst>
+                      <p:childTnLst>
+                        <p:par>
+                          <p:cTn id="14" fill="hold">
+                            <p:stCondLst>
+                              <p:cond delay="0"/>
+                            </p:stCondLst>
+                            <p:childTnLst>
                               <p:par>
-                                <p:cTn id="13" presetID="1" presetClass="entr" presetSubtype="0" fill="hold" nodeType="withEffect">
+                                <p:cTn id="15" presetID="1" presetClass="entr" presetSubtype="0" fill="hold" nodeType="clickEffect">
                                   <p:stCondLst>
                                     <p:cond delay="0"/>
                                   </p:stCondLst>
                                   <p:childTnLst>
                                     <p:set>
                                       <p:cBhvr>
-                                        <p:cTn id="14" dur="1" fill="hold">
+                                        <p:cTn id="16" dur="1" fill="hold">
                                           <p:stCondLst>
                                             <p:cond delay="0"/>
                                           </p:stCondLst>
                                         </p:cTn>
                                         <p:tgtEl>
                                           <p:spTgt spid="11"/>
+                                        </p:tgtEl>
+                                        <p:attrNameLst>
+                                          <p:attrName>style.visibility</p:attrName>
+                                        </p:attrNameLst>
+                                      </p:cBhvr>
+                                      <p:to>
+                                        <p:strVal val="visible"/>
+                                      </p:to>
+                                    </p:set>
+                                  </p:childTnLst>
+                                </p:cTn>
+                              </p:par>
+                              <p:par>
+                                <p:cTn id="17" presetID="1" presetClass="entr" presetSubtype="0" fill="hold" nodeType="withEffect">
+                                  <p:stCondLst>
+                                    <p:cond delay="0"/>
+                                  </p:stCondLst>
+                                  <p:childTnLst>
+                                    <p:set>
+                                      <p:cBhvr>
+                                        <p:cTn id="18" dur="1" fill="hold">
+                                          <p:stCondLst>
+                                            <p:cond delay="0"/>
+                                          </p:stCondLst>
+                                        </p:cTn>
+                                        <p:tgtEl>
+                                          <p:spTgt spid="12"/>
                                         </p:tgtEl>
                                         <p:attrNameLst>
                                           <p:attrName>style.visibility</p:attrName>
@@ -33563,7 +33894,7 @@
             <p:spPr>
               <a:xfrm>
                 <a:off x="548640" y="1371600"/>
-                <a:ext cx="8138160" cy="1798320"/>
+                <a:ext cx="8138160" cy="783335"/>
               </a:xfrm>
               <a:prstGeom prst="rect">
                 <a:avLst/>
@@ -33760,335 +34091,6 @@
                   <a:t>.</a:t>
                 </a:r>
               </a:p>
-              <a:p>
-                <a:pPr algn="l">
-                  <a:spcAft>
-                    <a:spcPts val="800"/>
-                  </a:spcAft>
-                </a:pPr>
-                <a:r>
-                  <a:rPr sz="2000" b="1">
-                    <a:solidFill>
-                      <a:srgbClr val="1E293B"/>
-                    </a:solidFill>
-                    <a:latin typeface="Calibri"/>
-                  </a:rPr>
-                  <a:t>4.9.</a:t>
-                </a:r>
-                <a:r>
-                  <a:rPr sz="2000">
-                    <a:solidFill>
-                      <a:srgbClr val="1E293B"/>
-                    </a:solidFill>
-                    <a:latin typeface="Calibri"/>
-                  </a:rPr>
-                  <a:t> Hình 4.19 biểu diễn hai lực </a:t>
-                </a:r>
-                <a14:m>
-                  <m:oMath xmlns:m="http://schemas.openxmlformats.org/officeDocument/2006/math">
-                    <m:acc>
-                      <m:accPr>
-                        <m:chr m:val="⃗"/>
-                      </m:accPr>
-                      <m:e>
-                        <m:sSub>
-                          <m:e>
-                            <m:r>
-                              <a:rPr lang="vi-VN" sz="2000" b="0">
-                                <a:solidFill>
-                                  <a:srgbClr val="1E293B"/>
-                                </a:solidFill>
-                                <a:latin typeface="Cambria Math" panose="02040503050406030204" pitchFamily="18" charset="0"/>
-                              </a:rPr>
-                              <m:t>F</m:t>
-                            </m:r>
-                          </m:e>
-                          <m:sub>
-                            <m:r>
-                              <a:rPr lang="vi-VN" sz="2000" b="0">
-                                <a:solidFill>
-                                  <a:srgbClr val="1E293B"/>
-                                </a:solidFill>
-                                <a:latin typeface="Cambria Math" panose="02040503050406030204" pitchFamily="18" charset="0"/>
-                              </a:rPr>
-                              <m:t>1</m:t>
-                            </m:r>
-                          </m:sub>
-                        </m:sSub>
-                      </m:e>
-                    </m:acc>
-                    <m:r>
-                      <a:rPr lang="vi-VN" sz="2000" b="0">
-                        <a:solidFill>
-                          <a:srgbClr val="1E293B"/>
-                        </a:solidFill>
-                        <a:latin typeface="Cambria Math" panose="02040503050406030204" pitchFamily="18" charset="0"/>
-                      </a:rPr>
-                      <m:t>,</m:t>
-                    </m:r>
-                    <m:r>
-                      <m:rPr>
-                        <m:sty m:val="p"/>
-                      </m:rPr>
-                      <a:rPr lang="vi-VN" sz="2000" b="0">
-                        <a:solidFill>
-                          <a:srgbClr val="1E293B"/>
-                        </a:solidFill>
-                        <a:latin typeface="Cambria Math" panose="02040503050406030204" pitchFamily="18" charset="0"/>
-                      </a:rPr>
-                      <m:t> </m:t>
-                    </m:r>
-                    <m:acc>
-                      <m:accPr>
-                        <m:chr m:val="⃗"/>
-                      </m:accPr>
-                      <m:e>
-                        <m:sSub>
-                          <m:e>
-                            <m:r>
-                              <a:rPr lang="vi-VN" sz="2000" b="0">
-                                <a:solidFill>
-                                  <a:srgbClr val="1E293B"/>
-                                </a:solidFill>
-                                <a:latin typeface="Cambria Math" panose="02040503050406030204" pitchFamily="18" charset="0"/>
-                              </a:rPr>
-                              <m:t>F</m:t>
-                            </m:r>
-                          </m:e>
-                          <m:sub>
-                            <m:r>
-                              <a:rPr lang="vi-VN" sz="2000" b="0">
-                                <a:solidFill>
-                                  <a:srgbClr val="1E293B"/>
-                                </a:solidFill>
-                                <a:latin typeface="Cambria Math" panose="02040503050406030204" pitchFamily="18" charset="0"/>
-                              </a:rPr>
-                              <m:t>2</m:t>
-                            </m:r>
-                          </m:sub>
-                        </m:sSub>
-                      </m:e>
-                    </m:acc>
-                  </m:oMath>
-                </a14:m>
-                <a:r>
-                  <a:rPr sz="2000">
-                    <a:solidFill>
-                      <a:srgbClr val="1E293B"/>
-                    </a:solidFill>
-                    <a:latin typeface="Calibri"/>
-                  </a:rPr>
-                  <a:t> cùng tác động lên một vật, cho </a:t>
-                </a:r>
-                <a14:m>
-                  <m:oMath xmlns:m="http://schemas.openxmlformats.org/officeDocument/2006/math">
-                    <m:r>
-                      <a:rPr lang="vi-VN" sz="2000" b="0">
-                        <a:solidFill>
-                          <a:srgbClr val="1E293B"/>
-                        </a:solidFill>
-                        <a:latin typeface="Cambria Math" panose="02040503050406030204" pitchFamily="18" charset="0"/>
-                      </a:rPr>
-                      <m:t>|</m:t>
-                    </m:r>
-                    <m:acc>
-                      <m:accPr>
-                        <m:chr m:val="⃗"/>
-                      </m:accPr>
-                      <m:e>
-                        <m:sSub>
-                          <m:e>
-                            <m:r>
-                              <a:rPr lang="vi-VN" sz="2000" b="0">
-                                <a:solidFill>
-                                  <a:srgbClr val="1E293B"/>
-                                </a:solidFill>
-                                <a:latin typeface="Cambria Math" panose="02040503050406030204" pitchFamily="18" charset="0"/>
-                              </a:rPr>
-                              <m:t>F</m:t>
-                            </m:r>
-                          </m:e>
-                          <m:sub>
-                            <m:r>
-                              <a:rPr lang="vi-VN" sz="2000" b="0">
-                                <a:solidFill>
-                                  <a:srgbClr val="1E293B"/>
-                                </a:solidFill>
-                                <a:latin typeface="Cambria Math" panose="02040503050406030204" pitchFamily="18" charset="0"/>
-                              </a:rPr>
-                              <m:t>1</m:t>
-                            </m:r>
-                          </m:sub>
-                        </m:sSub>
-                      </m:e>
-                    </m:acc>
-                    <m:r>
-                      <a:rPr lang="vi-VN" sz="2000" b="0">
-                        <a:solidFill>
-                          <a:srgbClr val="1E293B"/>
-                        </a:solidFill>
-                        <a:latin typeface="Cambria Math" panose="02040503050406030204" pitchFamily="18" charset="0"/>
-                      </a:rPr>
-                      <m:t>|=3</m:t>
-                    </m:r>
-                  </m:oMath>
-                </a14:m>
-                <a:r>
-                  <a:rPr sz="2000">
-                    <a:solidFill>
-                      <a:srgbClr val="1E293B"/>
-                    </a:solidFill>
-                    <a:latin typeface="Calibri"/>
-                  </a:rPr>
-                  <a:t> N, </a:t>
-                </a:r>
-                <a14:m>
-                  <m:oMath xmlns:m="http://schemas.openxmlformats.org/officeDocument/2006/math">
-                    <m:r>
-                      <a:rPr lang="vi-VN" sz="2000" b="0">
-                        <a:solidFill>
-                          <a:srgbClr val="1E293B"/>
-                        </a:solidFill>
-                        <a:latin typeface="Cambria Math" panose="02040503050406030204" pitchFamily="18" charset="0"/>
-                      </a:rPr>
-                      <m:t>|</m:t>
-                    </m:r>
-                    <m:acc>
-                      <m:accPr>
-                        <m:chr m:val="⃗"/>
-                      </m:accPr>
-                      <m:e>
-                        <m:sSub>
-                          <m:e>
-                            <m:r>
-                              <a:rPr lang="vi-VN" sz="2000" b="0">
-                                <a:solidFill>
-                                  <a:srgbClr val="1E293B"/>
-                                </a:solidFill>
-                                <a:latin typeface="Cambria Math" panose="02040503050406030204" pitchFamily="18" charset="0"/>
-                              </a:rPr>
-                              <m:t>F</m:t>
-                            </m:r>
-                          </m:e>
-                          <m:sub>
-                            <m:r>
-                              <a:rPr lang="vi-VN" sz="2000" b="0">
-                                <a:solidFill>
-                                  <a:srgbClr val="1E293B"/>
-                                </a:solidFill>
-                                <a:latin typeface="Cambria Math" panose="02040503050406030204" pitchFamily="18" charset="0"/>
-                              </a:rPr>
-                              <m:t>2</m:t>
-                            </m:r>
-                          </m:sub>
-                        </m:sSub>
-                      </m:e>
-                    </m:acc>
-                    <m:r>
-                      <a:rPr lang="vi-VN" sz="2000" b="0">
-                        <a:solidFill>
-                          <a:srgbClr val="1E293B"/>
-                        </a:solidFill>
-                        <a:latin typeface="Cambria Math" panose="02040503050406030204" pitchFamily="18" charset="0"/>
-                      </a:rPr>
-                      <m:t>|=2</m:t>
-                    </m:r>
-                  </m:oMath>
-                </a14:m>
-                <a:r>
-                  <a:rPr sz="2000">
-                    <a:solidFill>
-                      <a:srgbClr val="1E293B"/>
-                    </a:solidFill>
-                    <a:latin typeface="Calibri"/>
-                  </a:rPr>
-                  <a:t> N. Tính độ lớn của hợp lực </a:t>
-                </a:r>
-                <a14:m>
-                  <m:oMath xmlns:m="http://schemas.openxmlformats.org/officeDocument/2006/math">
-                    <m:acc>
-                      <m:accPr>
-                        <m:chr m:val="⃗"/>
-                      </m:accPr>
-                      <m:e>
-                        <m:sSub>
-                          <m:e>
-                            <m:r>
-                              <a:rPr lang="vi-VN" sz="2000" b="0">
-                                <a:solidFill>
-                                  <a:srgbClr val="1E293B"/>
-                                </a:solidFill>
-                                <a:latin typeface="Cambria Math" panose="02040503050406030204" pitchFamily="18" charset="0"/>
-                              </a:rPr>
-                              <m:t>F</m:t>
-                            </m:r>
-                          </m:e>
-                          <m:sub>
-                            <m:r>
-                              <a:rPr lang="vi-VN" sz="2000" b="0">
-                                <a:solidFill>
-                                  <a:srgbClr val="1E293B"/>
-                                </a:solidFill>
-                                <a:latin typeface="Cambria Math" panose="02040503050406030204" pitchFamily="18" charset="0"/>
-                              </a:rPr>
-                              <m:t>1</m:t>
-                            </m:r>
-                          </m:sub>
-                        </m:sSub>
-                      </m:e>
-                    </m:acc>
-                    <m:r>
-                      <a:rPr lang="vi-VN" sz="2000" b="0">
-                        <a:solidFill>
-                          <a:srgbClr val="1E293B"/>
-                        </a:solidFill>
-                        <a:latin typeface="Cambria Math" panose="02040503050406030204" pitchFamily="18" charset="0"/>
-                      </a:rPr>
-                      <m:t>+</m:t>
-                    </m:r>
-                    <m:acc>
-                      <m:accPr>
-                        <m:chr m:val="⃗"/>
-                      </m:accPr>
-                      <m:e>
-                        <m:sSub>
-                          <m:e>
-                            <m:r>
-                              <a:rPr lang="vi-VN" sz="2000" b="0">
-                                <a:solidFill>
-                                  <a:srgbClr val="1E293B"/>
-                                </a:solidFill>
-                                <a:latin typeface="Cambria Math" panose="02040503050406030204" pitchFamily="18" charset="0"/>
-                              </a:rPr>
-                              <m:t>F</m:t>
-                            </m:r>
-                          </m:e>
-                          <m:sub>
-                            <m:r>
-                              <a:rPr lang="vi-VN" sz="2000" b="0">
-                                <a:solidFill>
-                                  <a:srgbClr val="1E293B"/>
-                                </a:solidFill>
-                                <a:latin typeface="Cambria Math" panose="02040503050406030204" pitchFamily="18" charset="0"/>
-                              </a:rPr>
-                              <m:t>2</m:t>
-                            </m:r>
-                          </m:sub>
-                        </m:sSub>
-                      </m:e>
-                    </m:acc>
-                  </m:oMath>
-                </a14:m>
-                <a:r>
-                  <a:rPr sz="2000">
-                    <a:solidFill>
-                      <a:srgbClr val="1E293B"/>
-                    </a:solidFill>
-                    <a:latin typeface="Calibri"/>
-                  </a:rPr>
-                  <a:t>.</a:t>
-                </a:r>
-              </a:p>
             </p:txBody>
           </p:sp>
         </mc:Choice>
@@ -34102,7 +34104,7 @@
             <p:spPr>
               <a:xfrm>
                 <a:off x="548640" y="1371600"/>
-                <a:ext cx="8138160" cy="1798320"/>
+                <a:ext cx="8138160" cy="783335"/>
               </a:xfrm>
               <a:prstGeom prst="rect">
                 <a:avLst/>
@@ -34217,83 +34219,6 @@
                   <a:t>.</a:t>
                 </a:r>
               </a:p>
-              <a:p>
-                <a:pPr algn="l">
-                  <a:spcAft>
-                    <a:spcPts val="800"/>
-                  </a:spcAft>
-                </a:pPr>
-                <a:r>
-                  <a:rPr sz="2000" b="1">
-                    <a:solidFill>
-                      <a:srgbClr val="1E293B"/>
-                    </a:solidFill>
-                    <a:latin typeface="Calibri"/>
-                  </a:rPr>
-                  <a:t>4.9.</a:t>
-                </a:r>
-                <a:r>
-                  <a:rPr sz="2000">
-                    <a:solidFill>
-                      <a:srgbClr val="1E293B"/>
-                    </a:solidFill>
-                    <a:latin typeface="Calibri"/>
-                  </a:rPr>
-                  <a:t> Hình 4.19 biểu diễn hai lực </a:t>
-                </a:r>
-                <a:r>
-                  <a:rPr lang="vi-VN"/>
-                  <a:t>\vec{F_1},\ \vec{F_2}</a:t>
-                </a:r>
-                <a:r>
-                  <a:rPr sz="2000">
-                    <a:solidFill>
-                      <a:srgbClr val="1E293B"/>
-                    </a:solidFill>
-                    <a:latin typeface="Calibri"/>
-                  </a:rPr>
-                  <a:t> cùng tác động lên một vật, cho </a:t>
-                </a:r>
-                <a:r>
-                  <a:rPr lang="vi-VN"/>
-                  <a:t>|\vec{F_1}|=3</a:t>
-                </a:r>
-                <a:r>
-                  <a:rPr sz="2000">
-                    <a:solidFill>
-                      <a:srgbClr val="1E293B"/>
-                    </a:solidFill>
-                    <a:latin typeface="Calibri"/>
-                  </a:rPr>
-                  <a:t> N, </a:t>
-                </a:r>
-                <a:r>
-                  <a:rPr lang="vi-VN"/>
-                  <a:t>|\vec{F_2}|=2</a:t>
-                </a:r>
-                <a:r>
-                  <a:rPr sz="2000">
-                    <a:solidFill>
-                      <a:srgbClr val="1E293B"/>
-                    </a:solidFill>
-                    <a:latin typeface="Calibri"/>
-                  </a:rPr>
-                  <a:t> N. Tính độ lớn của hợp lực </a:t>
-                </a:r>
-                <a:r>
-                  <a:rPr lang="vi-VN"/>
-                  <a:t>\vec{F_1}+\vec{F_2}</a:t>
-                </a:r>
-                <a:r>
-                  <a:rPr sz="2000">
-                    <a:solidFill>
-                      <a:srgbClr val="1E293B"/>
-                    </a:solidFill>
-                    <a:latin typeface="Calibri"/>
-                  </a:rPr>
-                  <a:t>.</a:t>
-                </a:r>
-              </a:p>
             </p:txBody>
           </p:sp>
         </mc:Fallback>
@@ -34306,8 +34231,8 @@
         </p:nvSpPr>
         <p:spPr>
           <a:xfrm>
-            <a:off x="548640" y="3307080"/>
-            <a:ext cx="11064240" cy="569976"/>
+            <a:off x="548640" y="2218944"/>
+            <a:ext cx="8138160" cy="874775"/>
           </a:xfrm>
           <a:prstGeom prst="roundRect">
             <a:avLst>
@@ -34356,8 +34281,8 @@
             </p:nvSpPr>
             <p:spPr>
               <a:xfrm>
-                <a:off x="713232" y="3343656"/>
-                <a:ext cx="10735056" cy="496824"/>
+                <a:off x="713232" y="2255520"/>
+                <a:ext cx="7808976" cy="801623"/>
               </a:xfrm>
               <a:prstGeom prst="rect">
                 <a:avLst/>
@@ -34636,8 +34561,8 @@
             </p:nvSpPr>
             <p:spPr>
               <a:xfrm>
-                <a:off x="713232" y="3343656"/>
-                <a:ext cx="10735056" cy="496824"/>
+                <a:off x="713232" y="2255520"/>
+                <a:ext cx="7808976" cy="801623"/>
               </a:xfrm>
               <a:prstGeom prst="rect">
                 <a:avLst/>
@@ -34730,16 +34655,474 @@
           </p:sp>
         </mc:Fallback>
       </mc:AlternateContent>
+      <mc:AlternateContent xmlns:mc="http://schemas.openxmlformats.org/markup-compatibility/2006">
+        <mc:Choice xmlns:a14="http://schemas.microsoft.com/office/drawing/2010/main" Requires="a14">
+          <p:sp>
+            <p:nvSpPr>
+              <p:cNvPr id="10" name="s2_chu"/>
+              <p:cNvSpPr txBox="1"/>
+              <p:nvPr/>
+            </p:nvSpPr>
+            <p:spPr>
+              <a:xfrm>
+                <a:off x="548640" y="3157728"/>
+                <a:ext cx="8138160" cy="1088136"/>
+              </a:xfrm>
+              <a:prstGeom prst="rect">
+                <a:avLst/>
+              </a:prstGeom>
+              <a:noFill/>
+            </p:spPr>
+            <p:txBody>
+              <a:bodyPr wrap="square" anchor="t" lIns="45720" rIns="45720">
+                <a:spAutoFit/>
+              </a:bodyPr>
+              <a:lstStyle/>
+              <a:p>
+                <a:pPr algn="l">
+                  <a:spcAft>
+                    <a:spcPts val="800"/>
+                  </a:spcAft>
+                </a:pPr>
+                <a:r>
+                  <a:rPr sz="2000" b="1">
+                    <a:solidFill>
+                      <a:srgbClr val="1E293B"/>
+                    </a:solidFill>
+                    <a:latin typeface="Calibri"/>
+                  </a:rPr>
+                  <a:t>4.9.</a:t>
+                </a:r>
+                <a:r>
+                  <a:rPr sz="2000">
+                    <a:solidFill>
+                      <a:srgbClr val="1E293B"/>
+                    </a:solidFill>
+                    <a:latin typeface="Calibri"/>
+                  </a:rPr>
+                  <a:t> Hình 4.19 biểu diễn hai lực </a:t>
+                </a:r>
+                <a14:m>
+                  <m:oMath xmlns:m="http://schemas.openxmlformats.org/officeDocument/2006/math">
+                    <m:acc>
+                      <m:accPr>
+                        <m:chr m:val="⃗"/>
+                      </m:accPr>
+                      <m:e>
+                        <m:sSub>
+                          <m:e>
+                            <m:r>
+                              <a:rPr lang="vi-VN" sz="2000" b="0">
+                                <a:solidFill>
+                                  <a:srgbClr val="1E293B"/>
+                                </a:solidFill>
+                                <a:latin typeface="Cambria Math" panose="02040503050406030204" pitchFamily="18" charset="0"/>
+                              </a:rPr>
+                              <m:t>F</m:t>
+                            </m:r>
+                          </m:e>
+                          <m:sub>
+                            <m:r>
+                              <a:rPr lang="vi-VN" sz="2000" b="0">
+                                <a:solidFill>
+                                  <a:srgbClr val="1E293B"/>
+                                </a:solidFill>
+                                <a:latin typeface="Cambria Math" panose="02040503050406030204" pitchFamily="18" charset="0"/>
+                              </a:rPr>
+                              <m:t>1</m:t>
+                            </m:r>
+                          </m:sub>
+                        </m:sSub>
+                      </m:e>
+                    </m:acc>
+                    <m:r>
+                      <a:rPr lang="vi-VN" sz="2000" b="0">
+                        <a:solidFill>
+                          <a:srgbClr val="1E293B"/>
+                        </a:solidFill>
+                        <a:latin typeface="Cambria Math" panose="02040503050406030204" pitchFamily="18" charset="0"/>
+                      </a:rPr>
+                      <m:t>,</m:t>
+                    </m:r>
+                    <m:r>
+                      <m:rPr>
+                        <m:sty m:val="p"/>
+                      </m:rPr>
+                      <a:rPr lang="vi-VN" sz="2000" b="0">
+                        <a:solidFill>
+                          <a:srgbClr val="1E293B"/>
+                        </a:solidFill>
+                        <a:latin typeface="Cambria Math" panose="02040503050406030204" pitchFamily="18" charset="0"/>
+                      </a:rPr>
+                      <m:t> </m:t>
+                    </m:r>
+                    <m:acc>
+                      <m:accPr>
+                        <m:chr m:val="⃗"/>
+                      </m:accPr>
+                      <m:e>
+                        <m:sSub>
+                          <m:e>
+                            <m:r>
+                              <a:rPr lang="vi-VN" sz="2000" b="0">
+                                <a:solidFill>
+                                  <a:srgbClr val="1E293B"/>
+                                </a:solidFill>
+                                <a:latin typeface="Cambria Math" panose="02040503050406030204" pitchFamily="18" charset="0"/>
+                              </a:rPr>
+                              <m:t>F</m:t>
+                            </m:r>
+                          </m:e>
+                          <m:sub>
+                            <m:r>
+                              <a:rPr lang="vi-VN" sz="2000" b="0">
+                                <a:solidFill>
+                                  <a:srgbClr val="1E293B"/>
+                                </a:solidFill>
+                                <a:latin typeface="Cambria Math" panose="02040503050406030204" pitchFamily="18" charset="0"/>
+                              </a:rPr>
+                              <m:t>2</m:t>
+                            </m:r>
+                          </m:sub>
+                        </m:sSub>
+                      </m:e>
+                    </m:acc>
+                  </m:oMath>
+                </a14:m>
+                <a:r>
+                  <a:rPr sz="2000">
+                    <a:solidFill>
+                      <a:srgbClr val="1E293B"/>
+                    </a:solidFill>
+                    <a:latin typeface="Calibri"/>
+                  </a:rPr>
+                  <a:t> cùng tác động lên một vật, cho </a:t>
+                </a:r>
+                <a14:m>
+                  <m:oMath xmlns:m="http://schemas.openxmlformats.org/officeDocument/2006/math">
+                    <m:r>
+                      <a:rPr lang="vi-VN" sz="2000" b="0">
+                        <a:solidFill>
+                          <a:srgbClr val="1E293B"/>
+                        </a:solidFill>
+                        <a:latin typeface="Cambria Math" panose="02040503050406030204" pitchFamily="18" charset="0"/>
+                      </a:rPr>
+                      <m:t>|</m:t>
+                    </m:r>
+                    <m:acc>
+                      <m:accPr>
+                        <m:chr m:val="⃗"/>
+                      </m:accPr>
+                      <m:e>
+                        <m:sSub>
+                          <m:e>
+                            <m:r>
+                              <a:rPr lang="vi-VN" sz="2000" b="0">
+                                <a:solidFill>
+                                  <a:srgbClr val="1E293B"/>
+                                </a:solidFill>
+                                <a:latin typeface="Cambria Math" panose="02040503050406030204" pitchFamily="18" charset="0"/>
+                              </a:rPr>
+                              <m:t>F</m:t>
+                            </m:r>
+                          </m:e>
+                          <m:sub>
+                            <m:r>
+                              <a:rPr lang="vi-VN" sz="2000" b="0">
+                                <a:solidFill>
+                                  <a:srgbClr val="1E293B"/>
+                                </a:solidFill>
+                                <a:latin typeface="Cambria Math" panose="02040503050406030204" pitchFamily="18" charset="0"/>
+                              </a:rPr>
+                              <m:t>1</m:t>
+                            </m:r>
+                          </m:sub>
+                        </m:sSub>
+                      </m:e>
+                    </m:acc>
+                    <m:r>
+                      <a:rPr lang="vi-VN" sz="2000" b="0">
+                        <a:solidFill>
+                          <a:srgbClr val="1E293B"/>
+                        </a:solidFill>
+                        <a:latin typeface="Cambria Math" panose="02040503050406030204" pitchFamily="18" charset="0"/>
+                      </a:rPr>
+                      <m:t>|=3</m:t>
+                    </m:r>
+                  </m:oMath>
+                </a14:m>
+                <a:r>
+                  <a:rPr sz="2000">
+                    <a:solidFill>
+                      <a:srgbClr val="1E293B"/>
+                    </a:solidFill>
+                    <a:latin typeface="Calibri"/>
+                  </a:rPr>
+                  <a:t> N, </a:t>
+                </a:r>
+                <a14:m>
+                  <m:oMath xmlns:m="http://schemas.openxmlformats.org/officeDocument/2006/math">
+                    <m:r>
+                      <a:rPr lang="vi-VN" sz="2000" b="0">
+                        <a:solidFill>
+                          <a:srgbClr val="1E293B"/>
+                        </a:solidFill>
+                        <a:latin typeface="Cambria Math" panose="02040503050406030204" pitchFamily="18" charset="0"/>
+                      </a:rPr>
+                      <m:t>|</m:t>
+                    </m:r>
+                    <m:acc>
+                      <m:accPr>
+                        <m:chr m:val="⃗"/>
+                      </m:accPr>
+                      <m:e>
+                        <m:sSub>
+                          <m:e>
+                            <m:r>
+                              <a:rPr lang="vi-VN" sz="2000" b="0">
+                                <a:solidFill>
+                                  <a:srgbClr val="1E293B"/>
+                                </a:solidFill>
+                                <a:latin typeface="Cambria Math" panose="02040503050406030204" pitchFamily="18" charset="0"/>
+                              </a:rPr>
+                              <m:t>F</m:t>
+                            </m:r>
+                          </m:e>
+                          <m:sub>
+                            <m:r>
+                              <a:rPr lang="vi-VN" sz="2000" b="0">
+                                <a:solidFill>
+                                  <a:srgbClr val="1E293B"/>
+                                </a:solidFill>
+                                <a:latin typeface="Cambria Math" panose="02040503050406030204" pitchFamily="18" charset="0"/>
+                              </a:rPr>
+                              <m:t>2</m:t>
+                            </m:r>
+                          </m:sub>
+                        </m:sSub>
+                      </m:e>
+                    </m:acc>
+                    <m:r>
+                      <a:rPr lang="vi-VN" sz="2000" b="0">
+                        <a:solidFill>
+                          <a:srgbClr val="1E293B"/>
+                        </a:solidFill>
+                        <a:latin typeface="Cambria Math" panose="02040503050406030204" pitchFamily="18" charset="0"/>
+                      </a:rPr>
+                      <m:t>|=2</m:t>
+                    </m:r>
+                  </m:oMath>
+                </a14:m>
+                <a:r>
+                  <a:rPr sz="2000">
+                    <a:solidFill>
+                      <a:srgbClr val="1E293B"/>
+                    </a:solidFill>
+                    <a:latin typeface="Calibri"/>
+                  </a:rPr>
+                  <a:t> N. Tính độ lớn của hợp lực </a:t>
+                </a:r>
+                <a14:m>
+                  <m:oMath xmlns:m="http://schemas.openxmlformats.org/officeDocument/2006/math">
+                    <m:acc>
+                      <m:accPr>
+                        <m:chr m:val="⃗"/>
+                      </m:accPr>
+                      <m:e>
+                        <m:sSub>
+                          <m:e>
+                            <m:r>
+                              <a:rPr lang="vi-VN" sz="2000" b="0">
+                                <a:solidFill>
+                                  <a:srgbClr val="1E293B"/>
+                                </a:solidFill>
+                                <a:latin typeface="Cambria Math" panose="02040503050406030204" pitchFamily="18" charset="0"/>
+                              </a:rPr>
+                              <m:t>F</m:t>
+                            </m:r>
+                          </m:e>
+                          <m:sub>
+                            <m:r>
+                              <a:rPr lang="vi-VN" sz="2000" b="0">
+                                <a:solidFill>
+                                  <a:srgbClr val="1E293B"/>
+                                </a:solidFill>
+                                <a:latin typeface="Cambria Math" panose="02040503050406030204" pitchFamily="18" charset="0"/>
+                              </a:rPr>
+                              <m:t>1</m:t>
+                            </m:r>
+                          </m:sub>
+                        </m:sSub>
+                      </m:e>
+                    </m:acc>
+                    <m:r>
+                      <a:rPr lang="vi-VN" sz="2000" b="0">
+                        <a:solidFill>
+                          <a:srgbClr val="1E293B"/>
+                        </a:solidFill>
+                        <a:latin typeface="Cambria Math" panose="02040503050406030204" pitchFamily="18" charset="0"/>
+                      </a:rPr>
+                      <m:t>+</m:t>
+                    </m:r>
+                    <m:acc>
+                      <m:accPr>
+                        <m:chr m:val="⃗"/>
+                      </m:accPr>
+                      <m:e>
+                        <m:sSub>
+                          <m:e>
+                            <m:r>
+                              <a:rPr lang="vi-VN" sz="2000" b="0">
+                                <a:solidFill>
+                                  <a:srgbClr val="1E293B"/>
+                                </a:solidFill>
+                                <a:latin typeface="Cambria Math" panose="02040503050406030204" pitchFamily="18" charset="0"/>
+                              </a:rPr>
+                              <m:t>F</m:t>
+                            </m:r>
+                          </m:e>
+                          <m:sub>
+                            <m:r>
+                              <a:rPr lang="vi-VN" sz="2000" b="0">
+                                <a:solidFill>
+                                  <a:srgbClr val="1E293B"/>
+                                </a:solidFill>
+                                <a:latin typeface="Cambria Math" panose="02040503050406030204" pitchFamily="18" charset="0"/>
+                              </a:rPr>
+                              <m:t>2</m:t>
+                            </m:r>
+                          </m:sub>
+                        </m:sSub>
+                      </m:e>
+                    </m:acc>
+                  </m:oMath>
+                </a14:m>
+                <a:r>
+                  <a:rPr sz="2000">
+                    <a:solidFill>
+                      <a:srgbClr val="1E293B"/>
+                    </a:solidFill>
+                    <a:latin typeface="Calibri"/>
+                  </a:rPr>
+                  <a:t>.</a:t>
+                </a:r>
+              </a:p>
+            </p:txBody>
+          </p:sp>
+        </mc:Choice>
+        <mc:Fallback>
+          <p:sp>
+            <p:nvSpPr>
+              <p:cNvPr id="10" name="TextBox 9"/>
+              <p:cNvSpPr txBox="1"/>
+              <p:nvPr/>
+            </p:nvSpPr>
+            <p:spPr>
+              <a:xfrm>
+                <a:off x="548640" y="3157728"/>
+                <a:ext cx="8138160" cy="1088136"/>
+              </a:xfrm>
+              <a:prstGeom prst="rect">
+                <a:avLst/>
+              </a:prstGeom>
+              <a:noFill/>
+            </p:spPr>
+            <p:txBody>
+              <a:bodyPr wrap="square" anchor="t" lIns="45720" rIns="45720">
+                <a:spAutoFit/>
+              </a:bodyPr>
+              <a:lstStyle/>
+              <a:p>
+                <a:pPr algn="l">
+                  <a:spcAft>
+                    <a:spcPts val="800"/>
+                  </a:spcAft>
+                </a:pPr>
+                <a:r>
+                  <a:rPr sz="2000" b="1">
+                    <a:solidFill>
+                      <a:srgbClr val="1E293B"/>
+                    </a:solidFill>
+                    <a:latin typeface="Calibri"/>
+                  </a:rPr>
+                  <a:t>4.9.</a:t>
+                </a:r>
+                <a:r>
+                  <a:rPr sz="2000">
+                    <a:solidFill>
+                      <a:srgbClr val="1E293B"/>
+                    </a:solidFill>
+                    <a:latin typeface="Calibri"/>
+                  </a:rPr>
+                  <a:t> Hình 4.19 biểu diễn hai lực </a:t>
+                </a:r>
+                <a:r>
+                  <a:rPr lang="vi-VN"/>
+                  <a:t>\vec{F_1},\ \vec{F_2}</a:t>
+                </a:r>
+                <a:r>
+                  <a:rPr sz="2000">
+                    <a:solidFill>
+                      <a:srgbClr val="1E293B"/>
+                    </a:solidFill>
+                    <a:latin typeface="Calibri"/>
+                  </a:rPr>
+                  <a:t> cùng tác động lên một vật, cho </a:t>
+                </a:r>
+                <a:r>
+                  <a:rPr lang="vi-VN"/>
+                  <a:t>|\vec{F_1}|=3</a:t>
+                </a:r>
+                <a:r>
+                  <a:rPr sz="2000">
+                    <a:solidFill>
+                      <a:srgbClr val="1E293B"/>
+                    </a:solidFill>
+                    <a:latin typeface="Calibri"/>
+                  </a:rPr>
+                  <a:t> N, </a:t>
+                </a:r>
+                <a:r>
+                  <a:rPr lang="vi-VN"/>
+                  <a:t>|\vec{F_2}|=2</a:t>
+                </a:r>
+                <a:r>
+                  <a:rPr sz="2000">
+                    <a:solidFill>
+                      <a:srgbClr val="1E293B"/>
+                    </a:solidFill>
+                    <a:latin typeface="Calibri"/>
+                  </a:rPr>
+                  <a:t> N. Tính độ lớn của hợp lực </a:t>
+                </a:r>
+                <a:r>
+                  <a:rPr lang="vi-VN"/>
+                  <a:t>\vec{F_1}+\vec{F_2}</a:t>
+                </a:r>
+                <a:r>
+                  <a:rPr sz="2000">
+                    <a:solidFill>
+                      <a:srgbClr val="1E293B"/>
+                    </a:solidFill>
+                    <a:latin typeface="Calibri"/>
+                  </a:rPr>
+                  <a:t>.</a:t>
+                </a:r>
+              </a:p>
+            </p:txBody>
+          </p:sp>
+        </mc:Fallback>
+      </mc:AlternateContent>
       <p:sp>
         <p:nvSpPr>
-          <p:cNvPr id="10" name="s2_nen"/>
+          <p:cNvPr id="11" name="s3_nen"/>
           <p:cNvSpPr/>
           <p:nvPr/>
         </p:nvSpPr>
         <p:spPr>
           <a:xfrm>
-            <a:off x="548640" y="3968496"/>
-            <a:ext cx="11064240" cy="569976"/>
+            <a:off x="548640" y="4309872"/>
+            <a:ext cx="8138160" cy="569976"/>
           </a:xfrm>
           <a:prstGeom prst="roundRect">
             <a:avLst>
@@ -34782,14 +35165,14 @@
         <mc:Choice xmlns:a14="http://schemas.microsoft.com/office/drawing/2010/main" Requires="a14">
           <p:sp>
             <p:nvSpPr>
-              <p:cNvPr id="11" name="s2_chu"/>
+              <p:cNvPr id="12" name="s3_chu"/>
               <p:cNvSpPr txBox="1"/>
               <p:nvPr/>
             </p:nvSpPr>
             <p:spPr>
               <a:xfrm>
-                <a:off x="713232" y="4005072"/>
-                <a:ext cx="10735056" cy="496824"/>
+                <a:off x="713232" y="4346448"/>
+                <a:ext cx="7808976" cy="496824"/>
               </a:xfrm>
               <a:prstGeom prst="rect">
                 <a:avLst/>
@@ -35227,14 +35610,14 @@
         <mc:Fallback>
           <p:sp>
             <p:nvSpPr>
-              <p:cNvPr id="11" name="TextBox 10"/>
+              <p:cNvPr id="12" name="TextBox 11"/>
               <p:cNvSpPr txBox="1"/>
               <p:nvPr/>
             </p:nvSpPr>
             <p:spPr>
               <a:xfrm>
-                <a:off x="713232" y="4005072"/>
-                <a:ext cx="10735056" cy="496824"/>
+                <a:off x="713232" y="4346448"/>
+                <a:ext cx="7808976" cy="496824"/>
               </a:xfrm>
               <a:prstGeom prst="rect">
                 <a:avLst/>
@@ -35303,7 +35686,7 @@
       </mc:AlternateContent>
       <p:pic>
         <p:nvPicPr>
-          <p:cNvPr id="12" name="Picture 11" descr="h419.png"/>
+          <p:cNvPr id="13" name="Picture 12" descr="h419.png"/>
           <p:cNvPicPr>
             <a:picLocks noChangeAspect="1"/>
           </p:cNvPicPr>
@@ -35317,8 +35700,8 @@
         </p:blipFill>
         <p:spPr>
           <a:xfrm>
-            <a:off x="9062999" y="1371600"/>
-            <a:ext cx="2448002" cy="1798320"/>
+            <a:off x="8869680" y="1427706"/>
+            <a:ext cx="2834640" cy="2082347"/>
           </a:xfrm>
           <a:prstGeom prst="rect">
             <a:avLst/>
@@ -35449,21 +35832,66 @@
                                   </p:childTnLst>
                                 </p:cTn>
                               </p:par>
+                            </p:childTnLst>
+                          </p:cTn>
+                        </p:par>
+                      </p:childTnLst>
+                    </p:cTn>
+                  </p:par>
+                  <p:par>
+                    <p:cTn id="13" fill="hold">
+                      <p:stCondLst>
+                        <p:cond delay="indefinite"/>
+                      </p:stCondLst>
+                      <p:childTnLst>
+                        <p:par>
+                          <p:cTn id="14" fill="hold">
+                            <p:stCondLst>
+                              <p:cond delay="0"/>
+                            </p:stCondLst>
+                            <p:childTnLst>
                               <p:par>
-                                <p:cTn id="13" presetID="1" presetClass="entr" presetSubtype="0" fill="hold" nodeType="withEffect">
+                                <p:cTn id="15" presetID="1" presetClass="entr" presetSubtype="0" fill="hold" nodeType="clickEffect">
                                   <p:stCondLst>
                                     <p:cond delay="0"/>
                                   </p:stCondLst>
                                   <p:childTnLst>
                                     <p:set>
                                       <p:cBhvr>
-                                        <p:cTn id="14" dur="1" fill="hold">
+                                        <p:cTn id="16" dur="1" fill="hold">
                                           <p:stCondLst>
                                             <p:cond delay="0"/>
                                           </p:stCondLst>
                                         </p:cTn>
                                         <p:tgtEl>
                                           <p:spTgt spid="11"/>
+                                        </p:tgtEl>
+                                        <p:attrNameLst>
+                                          <p:attrName>style.visibility</p:attrName>
+                                        </p:attrNameLst>
+                                      </p:cBhvr>
+                                      <p:to>
+                                        <p:strVal val="visible"/>
+                                      </p:to>
+                                    </p:set>
+                                  </p:childTnLst>
+                                </p:cTn>
+                              </p:par>
+                              <p:par>
+                                <p:cTn id="17" presetID="1" presetClass="entr" presetSubtype="0" fill="hold" nodeType="withEffect">
+                                  <p:stCondLst>
+                                    <p:cond delay="0"/>
+                                  </p:stCondLst>
+                                  <p:childTnLst>
+                                    <p:set>
+                                      <p:cBhvr>
+                                        <p:cTn id="18" dur="1" fill="hold">
+                                          <p:stCondLst>
+                                            <p:cond delay="0"/>
+                                          </p:stCondLst>
+                                        </p:cTn>
+                                        <p:tgtEl>
+                                          <p:spTgt spid="12"/>
                                         </p:tgtEl>
                                         <p:attrNameLst>
                                           <p:attrName>style.visibility</p:attrName>
@@ -36349,8 +36777,8 @@
         </p:nvSpPr>
         <p:spPr>
           <a:xfrm>
-            <a:off x="548640" y="3816095"/>
-            <a:ext cx="11064240" cy="1179576"/>
+            <a:off x="548640" y="3742944"/>
+            <a:ext cx="8138160" cy="1179576"/>
           </a:xfrm>
           <a:prstGeom prst="roundRect">
             <a:avLst>
@@ -36399,8 +36827,8 @@
             </p:nvSpPr>
             <p:spPr>
               <a:xfrm>
-                <a:off x="713232" y="3852671"/>
-                <a:ext cx="10735056" cy="1106424"/>
+                <a:off x="713232" y="3779520"/>
+                <a:ext cx="7808976" cy="1106424"/>
               </a:xfrm>
               <a:prstGeom prst="rect">
                 <a:avLst/>
@@ -36541,8 +36969,8 @@
             </p:nvSpPr>
             <p:spPr>
               <a:xfrm>
-                <a:off x="713232" y="3852671"/>
-                <a:ext cx="10735056" cy="1106424"/>
+                <a:off x="713232" y="3779520"/>
+                <a:ext cx="7808976" cy="1106424"/>
               </a:xfrm>
               <a:prstGeom prst="rect">
                 <a:avLst/>
@@ -36621,7 +37049,7 @@
         </p:blipFill>
         <p:spPr>
           <a:xfrm>
-            <a:off x="8869680" y="1683204"/>
+            <a:off x="8869680" y="1626816"/>
             <a:ext cx="2834640" cy="1684127"/>
           </a:xfrm>
           <a:prstGeom prst="rect">
@@ -40740,7 +41168,7 @@
         <mc:Choice xmlns:a14="http://schemas.microsoft.com/office/drawing/2010/main" Requires="a14">
           <p:sp>
             <p:nvSpPr>
-              <p:cNvPr id="10" name="TextBox 9"/>
+              <p:cNvPr id="10" name="s2_chu"/>
               <p:cNvSpPr txBox="1"/>
               <p:nvPr/>
             </p:nvSpPr>
@@ -41001,7 +41429,7 @@
       </mc:AlternateContent>
       <p:sp>
         <p:nvSpPr>
-          <p:cNvPr id="11" name="s2_nen"/>
+          <p:cNvPr id="11" name="s3_nen"/>
           <p:cNvSpPr/>
           <p:nvPr/>
         </p:nvSpPr>
@@ -41051,7 +41479,7 @@
         <mc:Choice xmlns:a14="http://schemas.microsoft.com/office/drawing/2010/main" Requires="a14">
           <p:sp>
             <p:nvSpPr>
-              <p:cNvPr id="12" name="s2_chu"/>
+              <p:cNvPr id="12" name="s3_chu"/>
               <p:cNvSpPr txBox="1"/>
               <p:nvPr/>
             </p:nvSpPr>
@@ -41584,6 +42012,51 @@
                                           </p:stCondLst>
                                         </p:cTn>
                                         <p:tgtEl>
+                                          <p:spTgt spid="10"/>
+                                        </p:tgtEl>
+                                        <p:attrNameLst>
+                                          <p:attrName>style.visibility</p:attrName>
+                                        </p:attrNameLst>
+                                      </p:cBhvr>
+                                      <p:to>
+                                        <p:strVal val="visible"/>
+                                      </p:to>
+                                    </p:set>
+                                  </p:childTnLst>
+                                </p:cTn>
+                              </p:par>
+                            </p:childTnLst>
+                          </p:cTn>
+                        </p:par>
+                      </p:childTnLst>
+                    </p:cTn>
+                  </p:par>
+                  <p:par>
+                    <p:cTn id="13" fill="hold">
+                      <p:stCondLst>
+                        <p:cond delay="indefinite"/>
+                      </p:stCondLst>
+                      <p:childTnLst>
+                        <p:par>
+                          <p:cTn id="14" fill="hold">
+                            <p:stCondLst>
+                              <p:cond delay="0"/>
+                            </p:stCondLst>
+                            <p:childTnLst>
+                              <p:par>
+                                <p:cTn id="15" presetID="1" presetClass="entr" presetSubtype="0" fill="hold" nodeType="clickEffect">
+                                  <p:stCondLst>
+                                    <p:cond delay="0"/>
+                                  </p:stCondLst>
+                                  <p:childTnLst>
+                                    <p:set>
+                                      <p:cBhvr>
+                                        <p:cTn id="16" dur="1" fill="hold">
+                                          <p:stCondLst>
+                                            <p:cond delay="0"/>
+                                          </p:stCondLst>
+                                        </p:cTn>
+                                        <p:tgtEl>
                                           <p:spTgt spid="11"/>
                                         </p:tgtEl>
                                         <p:attrNameLst>
@@ -41598,14 +42071,14 @@
                                 </p:cTn>
                               </p:par>
                               <p:par>
-                                <p:cTn id="13" presetID="1" presetClass="entr" presetSubtype="0" fill="hold" nodeType="withEffect">
+                                <p:cTn id="17" presetID="1" presetClass="entr" presetSubtype="0" fill="hold" nodeType="withEffect">
                                   <p:stCondLst>
                                     <p:cond delay="0"/>
                                   </p:stCondLst>
                                   <p:childTnLst>
                                     <p:set>
                                       <p:cBhvr>
-                                        <p:cTn id="14" dur="1" fill="hold">
+                                        <p:cTn id="18" dur="1" fill="hold">
                                           <p:stCondLst>
                                             <p:cond delay="0"/>
                                           </p:stCondLst>
@@ -44962,7 +45435,7 @@
       </mc:AlternateContent>
       <p:sp>
         <p:nvSpPr>
-          <p:cNvPr id="12" name="Rounded Rectangle 11"/>
+          <p:cNvPr id="12" name="s3_nen"/>
           <p:cNvSpPr/>
           <p:nvPr/>
         </p:nvSpPr>
@@ -45012,7 +45485,7 @@
         <mc:Choice xmlns:a14="http://schemas.microsoft.com/office/drawing/2010/main" Requires="a14">
           <p:sp>
             <p:nvSpPr>
-              <p:cNvPr id="13" name="TextBox 12"/>
+              <p:cNvPr id="13" name="s3_chu"/>
               <p:cNvSpPr txBox="1"/>
               <p:nvPr/>
             </p:nvSpPr>
@@ -45969,6 +46442,78 @@
                                         </p:cTn>
                                         <p:tgtEl>
                                           <p:spTgt spid="11"/>
+                                        </p:tgtEl>
+                                        <p:attrNameLst>
+                                          <p:attrName>style.visibility</p:attrName>
+                                        </p:attrNameLst>
+                                      </p:cBhvr>
+                                      <p:to>
+                                        <p:strVal val="visible"/>
+                                      </p:to>
+                                    </p:set>
+                                  </p:childTnLst>
+                                </p:cTn>
+                              </p:par>
+                            </p:childTnLst>
+                          </p:cTn>
+                        </p:par>
+                      </p:childTnLst>
+                    </p:cTn>
+                  </p:par>
+                  <p:par>
+                    <p:cTn id="15" fill="hold">
+                      <p:stCondLst>
+                        <p:cond delay="indefinite"/>
+                      </p:stCondLst>
+                      <p:childTnLst>
+                        <p:par>
+                          <p:cTn id="16" fill="hold">
+                            <p:stCondLst>
+                              <p:cond delay="0"/>
+                            </p:stCondLst>
+                            <p:childTnLst>
+                              <p:par>
+                                <p:cTn id="17" presetID="1" presetClass="entr" presetSubtype="0" fill="hold" nodeType="clickEffect">
+                                  <p:stCondLst>
+                                    <p:cond delay="0"/>
+                                  </p:stCondLst>
+                                  <p:childTnLst>
+                                    <p:set>
+                                      <p:cBhvr>
+                                        <p:cTn id="18" dur="1" fill="hold">
+                                          <p:stCondLst>
+                                            <p:cond delay="0"/>
+                                          </p:stCondLst>
+                                        </p:cTn>
+                                        <p:tgtEl>
+                                          <p:spTgt spid="12"/>
+                                        </p:tgtEl>
+                                        <p:attrNameLst>
+                                          <p:attrName>style.visibility</p:attrName>
+                                        </p:attrNameLst>
+                                      </p:cBhvr>
+                                      <p:to>
+                                        <p:strVal val="visible"/>
+                                      </p:to>
+                                    </p:set>
+                                  </p:childTnLst>
+                                </p:cTn>
+                              </p:par>
+                              <p:par>
+                                <p:cTn id="19" presetID="1" presetClass="entr" presetSubtype="0" fill="hold" nodeType="withEffect">
+                                  <p:stCondLst>
+                                    <p:cond delay="0"/>
+                                  </p:stCondLst>
+                                  <p:childTnLst>
+                                    <p:set>
+                                      <p:cBhvr>
+                                        <p:cTn id="20" dur="1" fill="hold">
+                                          <p:stCondLst>
+                                            <p:cond delay="0"/>
+                                          </p:stCondLst>
+                                        </p:cTn>
+                                        <p:tgtEl>
+                                          <p:spTgt spid="13"/>
                                         </p:tgtEl>
                                         <p:attrNameLst>
                                           <p:attrName>style.visibility</p:attrName>
@@ -47681,7 +48226,7 @@
         <mc:Choice xmlns:a14="http://schemas.microsoft.com/office/drawing/2010/main" Requires="a14">
           <p:sp>
             <p:nvSpPr>
-              <p:cNvPr id="12" name="TextBox 11"/>
+              <p:cNvPr id="12" name="s3_chu"/>
               <p:cNvSpPr txBox="1"/>
               <p:nvPr/>
             </p:nvSpPr>
@@ -48101,7 +48646,7 @@
       </mc:AlternateContent>
       <p:sp>
         <p:nvSpPr>
-          <p:cNvPr id="13" name="s3_nen"/>
+          <p:cNvPr id="13" name="s4_nen"/>
           <p:cNvSpPr/>
           <p:nvPr/>
         </p:nvSpPr>
@@ -48151,7 +48696,7 @@
         <mc:Choice xmlns:a14="http://schemas.microsoft.com/office/drawing/2010/main" Requires="a14">
           <p:sp>
             <p:nvSpPr>
-              <p:cNvPr id="14" name="s3_chu"/>
+              <p:cNvPr id="14" name="s4_chu"/>
               <p:cNvSpPr txBox="1"/>
               <p:nvPr/>
             </p:nvSpPr>
@@ -48917,6 +49462,51 @@
                                           </p:stCondLst>
                                         </p:cTn>
                                         <p:tgtEl>
+                                          <p:spTgt spid="12"/>
+                                        </p:tgtEl>
+                                        <p:attrNameLst>
+                                          <p:attrName>style.visibility</p:attrName>
+                                        </p:attrNameLst>
+                                      </p:cBhvr>
+                                      <p:to>
+                                        <p:strVal val="visible"/>
+                                      </p:to>
+                                    </p:set>
+                                  </p:childTnLst>
+                                </p:cTn>
+                              </p:par>
+                            </p:childTnLst>
+                          </p:cTn>
+                        </p:par>
+                      </p:childTnLst>
+                    </p:cTn>
+                  </p:par>
+                  <p:par>
+                    <p:cTn id="19" fill="hold">
+                      <p:stCondLst>
+                        <p:cond delay="indefinite"/>
+                      </p:stCondLst>
+                      <p:childTnLst>
+                        <p:par>
+                          <p:cTn id="20" fill="hold">
+                            <p:stCondLst>
+                              <p:cond delay="0"/>
+                            </p:stCondLst>
+                            <p:childTnLst>
+                              <p:par>
+                                <p:cTn id="21" presetID="1" presetClass="entr" presetSubtype="0" fill="hold" nodeType="clickEffect">
+                                  <p:stCondLst>
+                                    <p:cond delay="0"/>
+                                  </p:stCondLst>
+                                  <p:childTnLst>
+                                    <p:set>
+                                      <p:cBhvr>
+                                        <p:cTn id="22" dur="1" fill="hold">
+                                          <p:stCondLst>
+                                            <p:cond delay="0"/>
+                                          </p:stCondLst>
+                                        </p:cTn>
+                                        <p:tgtEl>
                                           <p:spTgt spid="13"/>
                                         </p:tgtEl>
                                         <p:attrNameLst>
@@ -48931,14 +49521,14 @@
                                 </p:cTn>
                               </p:par>
                               <p:par>
-                                <p:cTn id="19" presetID="1" presetClass="entr" presetSubtype="0" fill="hold" nodeType="withEffect">
+                                <p:cTn id="23" presetID="1" presetClass="entr" presetSubtype="0" fill="hold" nodeType="withEffect">
                                   <p:stCondLst>
                                     <p:cond delay="0"/>
                                   </p:stCondLst>
                                   <p:childTnLst>
                                     <p:set>
                                       <p:cBhvr>
-                                        <p:cTn id="20" dur="1" fill="hold">
+                                        <p:cTn id="24" dur="1" fill="hold">
                                           <p:stCondLst>
                                             <p:cond delay="0"/>
                                           </p:stCondLst>
